--- a/presentations/WorldWithWeb_Session_03_DigitalProfile.pptx
+++ b/presentations/WorldWithWeb_Session_03_DigitalProfile.pptx
@@ -4,29 +4,32 @@
   <p:sldMasterIdLst>
     <p:sldMasterId id="2147483648" r:id="rId1"/>
   </p:sldMasterIdLst>
+  <p:notesMasterIdLst>
+    <p:notesMasterId r:id="rId22"/>
+  </p:notesMasterIdLst>
   <p:sldIdLst>
-    <p:sldId id="256" r:id="rId7"/>
-    <p:sldId id="257" r:id="rId8"/>
-    <p:sldId id="258" r:id="rId9"/>
-    <p:sldId id="259" r:id="rId10"/>
-    <p:sldId id="260" r:id="rId11"/>
-    <p:sldId id="261" r:id="rId12"/>
-    <p:sldId id="262" r:id="rId13"/>
-    <p:sldId id="263" r:id="rId14"/>
-    <p:sldId id="264" r:id="rId15"/>
-    <p:sldId id="265" r:id="rId16"/>
-    <p:sldId id="266" r:id="rId17"/>
-    <p:sldId id="267" r:id="rId18"/>
-    <p:sldId id="268" r:id="rId19"/>
-    <p:sldId id="269" r:id="rId20"/>
-    <p:sldId id="270" r:id="rId21"/>
-    <p:sldId id="271" r:id="rId22"/>
-    <p:sldId id="272" r:id="rId23"/>
-    <p:sldId id="273" r:id="rId24"/>
-    <p:sldId id="274" r:id="rId25"/>
-    <p:sldId id="275" r:id="rId26"/>
+    <p:sldId id="256" r:id="rId2"/>
+    <p:sldId id="257" r:id="rId3"/>
+    <p:sldId id="258" r:id="rId4"/>
+    <p:sldId id="259" r:id="rId5"/>
+    <p:sldId id="260" r:id="rId6"/>
+    <p:sldId id="261" r:id="rId7"/>
+    <p:sldId id="262" r:id="rId8"/>
+    <p:sldId id="263" r:id="rId9"/>
+    <p:sldId id="264" r:id="rId10"/>
+    <p:sldId id="265" r:id="rId11"/>
+    <p:sldId id="266" r:id="rId12"/>
+    <p:sldId id="267" r:id="rId13"/>
+    <p:sldId id="268" r:id="rId14"/>
+    <p:sldId id="269" r:id="rId15"/>
+    <p:sldId id="270" r:id="rId16"/>
+    <p:sldId id="271" r:id="rId17"/>
+    <p:sldId id="272" r:id="rId18"/>
+    <p:sldId id="273" r:id="rId19"/>
+    <p:sldId id="274" r:id="rId20"/>
+    <p:sldId id="275" r:id="rId21"/>
   </p:sldIdLst>
-  <p:sldSz cx="12191695" cy="6858000" type="screen4x3"/>
+  <p:sldSz cx="12192000" cy="6858000"/>
   <p:notesSz cx="6858000" cy="9144000"/>
   <p:defaultTextStyle>
     <a:defPPr>
@@ -123,7 +126,2611 @@
       </a:defRPr>
     </a:lvl9pPr>
   </p:defaultTextStyle>
+  <p:extLst>
+    <p:ext uri="{EFAFB233-063F-42B5-8137-9DF3F51BA10A}">
+      <p15:sldGuideLst xmlns:p15="http://schemas.microsoft.com/office/powerpoint/2012/main">
+        <p15:guide id="1" orient="horz" pos="2160">
+          <p15:clr>
+            <a:srgbClr val="A4A3A4"/>
+          </p15:clr>
+        </p15:guide>
+        <p15:guide id="2" pos="2880">
+          <p15:clr>
+            <a:srgbClr val="A4A3A4"/>
+          </p15:clr>
+        </p15:guide>
+      </p15:sldGuideLst>
+    </p:ext>
+  </p:extLst>
 </p:presentation>
+</file>
+
+<file path=ppt/notesMasters/notesMaster1.xml><?xml version="1.0" encoding="utf-8"?>
+<p:notesMaster xmlns:a="http://schemas.openxmlformats.org/drawingml/2006/main" xmlns:r="http://schemas.openxmlformats.org/officeDocument/2006/relationships" xmlns:p="http://schemas.openxmlformats.org/presentationml/2006/main">
+  <p:cSld>
+    <p:bg>
+      <p:bgRef idx="1001">
+        <a:schemeClr val="bg1"/>
+      </p:bgRef>
+    </p:bg>
+    <p:spTree>
+      <p:nvGrpSpPr>
+        <p:cNvPr id="1" name=""/>
+        <p:cNvGrpSpPr/>
+        <p:nvPr/>
+      </p:nvGrpSpPr>
+      <p:grpSpPr>
+        <a:xfrm>
+          <a:off x="0" y="0"/>
+          <a:ext cx="0" cy="0"/>
+          <a:chOff x="0" y="0"/>
+          <a:chExt cx="0" cy="0"/>
+        </a:xfrm>
+      </p:grpSpPr>
+      <p:sp>
+        <p:nvSpPr>
+          <p:cNvPr id="2" name="Header Placeholder 1"/>
+          <p:cNvSpPr>
+            <a:spLocks noGrp="1"/>
+          </p:cNvSpPr>
+          <p:nvPr>
+            <p:ph type="hdr" sz="quarter"/>
+          </p:nvPr>
+        </p:nvSpPr>
+        <p:spPr>
+          <a:xfrm>
+            <a:off x="0" y="0"/>
+            <a:ext cx="2971800" cy="458788"/>
+          </a:xfrm>
+          <a:prstGeom prst="rect">
+            <a:avLst/>
+          </a:prstGeom>
+        </p:spPr>
+        <p:txBody>
+          <a:bodyPr vert="horz" lIns="91440" tIns="45720" rIns="91440" bIns="45720" rtlCol="0"/>
+          <a:lstStyle>
+            <a:lvl1pPr algn="l">
+              <a:defRPr sz="1200"/>
+            </a:lvl1pPr>
+          </a:lstStyle>
+          <a:p>
+            <a:endParaRPr lang="en-IN"/>
+          </a:p>
+        </p:txBody>
+      </p:sp>
+      <p:sp>
+        <p:nvSpPr>
+          <p:cNvPr id="3" name="Date Placeholder 2"/>
+          <p:cNvSpPr>
+            <a:spLocks noGrp="1"/>
+          </p:cNvSpPr>
+          <p:nvPr>
+            <p:ph type="dt" idx="1"/>
+          </p:nvPr>
+        </p:nvSpPr>
+        <p:spPr>
+          <a:xfrm>
+            <a:off x="3884613" y="0"/>
+            <a:ext cx="2971800" cy="458788"/>
+          </a:xfrm>
+          <a:prstGeom prst="rect">
+            <a:avLst/>
+          </a:prstGeom>
+        </p:spPr>
+        <p:txBody>
+          <a:bodyPr vert="horz" lIns="91440" tIns="45720" rIns="91440" bIns="45720" rtlCol="0"/>
+          <a:lstStyle>
+            <a:lvl1pPr algn="r">
+              <a:defRPr sz="1200"/>
+            </a:lvl1pPr>
+          </a:lstStyle>
+          <a:p>
+            <a:fld id="{45097127-B0BE-4C45-96E3-E932FA0C9896}" type="datetimeFigureOut">
+              <a:rPr lang="en-IN" smtClean="0"/>
+              <a:t>29-04-2026</a:t>
+            </a:fld>
+            <a:endParaRPr lang="en-IN"/>
+          </a:p>
+        </p:txBody>
+      </p:sp>
+      <p:sp>
+        <p:nvSpPr>
+          <p:cNvPr id="4" name="Slide Image Placeholder 3"/>
+          <p:cNvSpPr>
+            <a:spLocks noGrp="1" noRot="1" noChangeAspect="1"/>
+          </p:cNvSpPr>
+          <p:nvPr>
+            <p:ph type="sldImg" idx="2"/>
+          </p:nvPr>
+        </p:nvSpPr>
+        <p:spPr>
+          <a:xfrm>
+            <a:off x="685800" y="1143000"/>
+            <a:ext cx="5486400" cy="3086100"/>
+          </a:xfrm>
+          <a:prstGeom prst="rect">
+            <a:avLst/>
+          </a:prstGeom>
+          <a:noFill/>
+          <a:ln w="12700">
+            <a:solidFill>
+              <a:prstClr val="black"/>
+            </a:solidFill>
+          </a:ln>
+        </p:spPr>
+        <p:txBody>
+          <a:bodyPr vert="horz" lIns="91440" tIns="45720" rIns="91440" bIns="45720" rtlCol="0" anchor="ctr"/>
+          <a:lstStyle/>
+          <a:p>
+            <a:endParaRPr lang="en-IN"/>
+          </a:p>
+        </p:txBody>
+      </p:sp>
+      <p:sp>
+        <p:nvSpPr>
+          <p:cNvPr id="5" name="Notes Placeholder 4"/>
+          <p:cNvSpPr>
+            <a:spLocks noGrp="1"/>
+          </p:cNvSpPr>
+          <p:nvPr>
+            <p:ph type="body" sz="quarter" idx="3"/>
+          </p:nvPr>
+        </p:nvSpPr>
+        <p:spPr>
+          <a:xfrm>
+            <a:off x="685800" y="4400550"/>
+            <a:ext cx="5486400" cy="3600450"/>
+          </a:xfrm>
+          <a:prstGeom prst="rect">
+            <a:avLst/>
+          </a:prstGeom>
+        </p:spPr>
+        <p:txBody>
+          <a:bodyPr vert="horz" lIns="91440" tIns="45720" rIns="91440" bIns="45720" rtlCol="0"/>
+          <a:lstStyle/>
+          <a:p>
+            <a:pPr lvl="0"/>
+            <a:r>
+              <a:rPr lang="en-US"/>
+              <a:t>Click to edit Master text styles</a:t>
+            </a:r>
+          </a:p>
+          <a:p>
+            <a:pPr lvl="1"/>
+            <a:r>
+              <a:rPr lang="en-US"/>
+              <a:t>Second level</a:t>
+            </a:r>
+          </a:p>
+          <a:p>
+            <a:pPr lvl="2"/>
+            <a:r>
+              <a:rPr lang="en-US"/>
+              <a:t>Third level</a:t>
+            </a:r>
+          </a:p>
+          <a:p>
+            <a:pPr lvl="3"/>
+            <a:r>
+              <a:rPr lang="en-US"/>
+              <a:t>Fourth level</a:t>
+            </a:r>
+          </a:p>
+          <a:p>
+            <a:pPr lvl="4"/>
+            <a:r>
+              <a:rPr lang="en-US"/>
+              <a:t>Fifth level</a:t>
+            </a:r>
+            <a:endParaRPr lang="en-IN"/>
+          </a:p>
+        </p:txBody>
+      </p:sp>
+      <p:sp>
+        <p:nvSpPr>
+          <p:cNvPr id="6" name="Footer Placeholder 5"/>
+          <p:cNvSpPr>
+            <a:spLocks noGrp="1"/>
+          </p:cNvSpPr>
+          <p:nvPr>
+            <p:ph type="ftr" sz="quarter" idx="4"/>
+          </p:nvPr>
+        </p:nvSpPr>
+        <p:spPr>
+          <a:xfrm>
+            <a:off x="0" y="8685213"/>
+            <a:ext cx="2971800" cy="458787"/>
+          </a:xfrm>
+          <a:prstGeom prst="rect">
+            <a:avLst/>
+          </a:prstGeom>
+        </p:spPr>
+        <p:txBody>
+          <a:bodyPr vert="horz" lIns="91440" tIns="45720" rIns="91440" bIns="45720" rtlCol="0" anchor="b"/>
+          <a:lstStyle>
+            <a:lvl1pPr algn="l">
+              <a:defRPr sz="1200"/>
+            </a:lvl1pPr>
+          </a:lstStyle>
+          <a:p>
+            <a:endParaRPr lang="en-IN"/>
+          </a:p>
+        </p:txBody>
+      </p:sp>
+      <p:sp>
+        <p:nvSpPr>
+          <p:cNvPr id="7" name="Slide Number Placeholder 6"/>
+          <p:cNvSpPr>
+            <a:spLocks noGrp="1"/>
+          </p:cNvSpPr>
+          <p:nvPr>
+            <p:ph type="sldNum" sz="quarter" idx="5"/>
+          </p:nvPr>
+        </p:nvSpPr>
+        <p:spPr>
+          <a:xfrm>
+            <a:off x="3884613" y="8685213"/>
+            <a:ext cx="2971800" cy="458787"/>
+          </a:xfrm>
+          <a:prstGeom prst="rect">
+            <a:avLst/>
+          </a:prstGeom>
+        </p:spPr>
+        <p:txBody>
+          <a:bodyPr vert="horz" lIns="91440" tIns="45720" rIns="91440" bIns="45720" rtlCol="0" anchor="b"/>
+          <a:lstStyle>
+            <a:lvl1pPr algn="r">
+              <a:defRPr sz="1200"/>
+            </a:lvl1pPr>
+          </a:lstStyle>
+          <a:p>
+            <a:fld id="{0F820492-BEBC-4334-926F-386A19F3356A}" type="slidenum">
+              <a:rPr lang="en-IN" smtClean="0"/>
+              <a:t>‹#›</a:t>
+            </a:fld>
+            <a:endParaRPr lang="en-IN"/>
+          </a:p>
+        </p:txBody>
+      </p:sp>
+    </p:spTree>
+    <p:extLst>
+      <p:ext uri="{BB962C8B-B14F-4D97-AF65-F5344CB8AC3E}">
+        <p14:creationId xmlns:p14="http://schemas.microsoft.com/office/powerpoint/2010/main" val="507377526"/>
+      </p:ext>
+    </p:extLst>
+  </p:cSld>
+  <p:clrMap bg1="lt1" tx1="dk1" bg2="lt2" tx2="dk2" accent1="accent1" accent2="accent2" accent3="accent3" accent4="accent4" accent5="accent5" accent6="accent6" hlink="hlink" folHlink="folHlink"/>
+  <p:notesStyle>
+    <a:lvl1pPr marL="0" algn="l" defTabSz="914400" rtl="0" eaLnBrk="1" latinLnBrk="0" hangingPunct="1">
+      <a:defRPr sz="1200" kern="1200">
+        <a:solidFill>
+          <a:schemeClr val="tx1"/>
+        </a:solidFill>
+        <a:latin typeface="+mn-lt"/>
+        <a:ea typeface="+mn-ea"/>
+        <a:cs typeface="+mn-cs"/>
+      </a:defRPr>
+    </a:lvl1pPr>
+    <a:lvl2pPr marL="457200" algn="l" defTabSz="914400" rtl="0" eaLnBrk="1" latinLnBrk="0" hangingPunct="1">
+      <a:defRPr sz="1200" kern="1200">
+        <a:solidFill>
+          <a:schemeClr val="tx1"/>
+        </a:solidFill>
+        <a:latin typeface="+mn-lt"/>
+        <a:ea typeface="+mn-ea"/>
+        <a:cs typeface="+mn-cs"/>
+      </a:defRPr>
+    </a:lvl2pPr>
+    <a:lvl3pPr marL="914400" algn="l" defTabSz="914400" rtl="0" eaLnBrk="1" latinLnBrk="0" hangingPunct="1">
+      <a:defRPr sz="1200" kern="1200">
+        <a:solidFill>
+          <a:schemeClr val="tx1"/>
+        </a:solidFill>
+        <a:latin typeface="+mn-lt"/>
+        <a:ea typeface="+mn-ea"/>
+        <a:cs typeface="+mn-cs"/>
+      </a:defRPr>
+    </a:lvl3pPr>
+    <a:lvl4pPr marL="1371600" algn="l" defTabSz="914400" rtl="0" eaLnBrk="1" latinLnBrk="0" hangingPunct="1">
+      <a:defRPr sz="1200" kern="1200">
+        <a:solidFill>
+          <a:schemeClr val="tx1"/>
+        </a:solidFill>
+        <a:latin typeface="+mn-lt"/>
+        <a:ea typeface="+mn-ea"/>
+        <a:cs typeface="+mn-cs"/>
+      </a:defRPr>
+    </a:lvl4pPr>
+    <a:lvl5pPr marL="1828800" algn="l" defTabSz="914400" rtl="0" eaLnBrk="1" latinLnBrk="0" hangingPunct="1">
+      <a:defRPr sz="1200" kern="1200">
+        <a:solidFill>
+          <a:schemeClr val="tx1"/>
+        </a:solidFill>
+        <a:latin typeface="+mn-lt"/>
+        <a:ea typeface="+mn-ea"/>
+        <a:cs typeface="+mn-cs"/>
+      </a:defRPr>
+    </a:lvl5pPr>
+    <a:lvl6pPr marL="2286000" algn="l" defTabSz="914400" rtl="0" eaLnBrk="1" latinLnBrk="0" hangingPunct="1">
+      <a:defRPr sz="1200" kern="1200">
+        <a:solidFill>
+          <a:schemeClr val="tx1"/>
+        </a:solidFill>
+        <a:latin typeface="+mn-lt"/>
+        <a:ea typeface="+mn-ea"/>
+        <a:cs typeface="+mn-cs"/>
+      </a:defRPr>
+    </a:lvl6pPr>
+    <a:lvl7pPr marL="2743200" algn="l" defTabSz="914400" rtl="0" eaLnBrk="1" latinLnBrk="0" hangingPunct="1">
+      <a:defRPr sz="1200" kern="1200">
+        <a:solidFill>
+          <a:schemeClr val="tx1"/>
+        </a:solidFill>
+        <a:latin typeface="+mn-lt"/>
+        <a:ea typeface="+mn-ea"/>
+        <a:cs typeface="+mn-cs"/>
+      </a:defRPr>
+    </a:lvl7pPr>
+    <a:lvl8pPr marL="3200400" algn="l" defTabSz="914400" rtl="0" eaLnBrk="1" latinLnBrk="0" hangingPunct="1">
+      <a:defRPr sz="1200" kern="1200">
+        <a:solidFill>
+          <a:schemeClr val="tx1"/>
+        </a:solidFill>
+        <a:latin typeface="+mn-lt"/>
+        <a:ea typeface="+mn-ea"/>
+        <a:cs typeface="+mn-cs"/>
+      </a:defRPr>
+    </a:lvl8pPr>
+    <a:lvl9pPr marL="3657600" algn="l" defTabSz="914400" rtl="0" eaLnBrk="1" latinLnBrk="0" hangingPunct="1">
+      <a:defRPr sz="1200" kern="1200">
+        <a:solidFill>
+          <a:schemeClr val="tx1"/>
+        </a:solidFill>
+        <a:latin typeface="+mn-lt"/>
+        <a:ea typeface="+mn-ea"/>
+        <a:cs typeface="+mn-cs"/>
+      </a:defRPr>
+    </a:lvl9pPr>
+  </p:notesStyle>
+</p:notesMaster>
+</file>
+
+<file path=ppt/notesSlides/notesSlide1.xml><?xml version="1.0" encoding="utf-8"?>
+<p:notes xmlns:a="http://schemas.openxmlformats.org/drawingml/2006/main" xmlns:r="http://schemas.openxmlformats.org/officeDocument/2006/relationships" xmlns:p="http://schemas.openxmlformats.org/presentationml/2006/main">
+  <p:cSld>
+    <p:spTree>
+      <p:nvGrpSpPr>
+        <p:cNvPr id="1" name=""/>
+        <p:cNvGrpSpPr/>
+        <p:nvPr/>
+      </p:nvGrpSpPr>
+      <p:grpSpPr>
+        <a:xfrm>
+          <a:off x="0" y="0"/>
+          <a:ext cx="0" cy="0"/>
+          <a:chOff x="0" y="0"/>
+          <a:chExt cx="0" cy="0"/>
+        </a:xfrm>
+      </p:grpSpPr>
+      <p:sp>
+        <p:nvSpPr>
+          <p:cNvPr id="2" name="Slide Image Placeholder 1"/>
+          <p:cNvSpPr>
+            <a:spLocks noGrp="1" noRot="1" noChangeAspect="1"/>
+          </p:cNvSpPr>
+          <p:nvPr>
+            <p:ph type="sldImg"/>
+          </p:nvPr>
+        </p:nvSpPr>
+        <p:spPr/>
+      </p:sp>
+      <p:sp>
+        <p:nvSpPr>
+          <p:cNvPr id="3" name="Notes Placeholder 2"/>
+          <p:cNvSpPr>
+            <a:spLocks noGrp="1"/>
+          </p:cNvSpPr>
+          <p:nvPr>
+            <p:ph type="body" idx="1"/>
+          </p:nvPr>
+        </p:nvSpPr>
+        <p:spPr/>
+        <p:txBody>
+          <a:bodyPr/>
+          <a:lstStyle/>
+          <a:p>
+            <a:r>
+              <a:rPr lang="en-US" sz="1200" b="0" kern="1200" dirty="0">
+                <a:solidFill>
+                  <a:schemeClr val="tx1"/>
+                </a:solidFill>
+                <a:effectLst/>
+                <a:latin typeface="+mn-lt"/>
+                <a:ea typeface="+mn-ea"/>
+                <a:cs typeface="+mn-cs"/>
+              </a:rPr>
+              <a:t>&gt; "Two students. Same skills. Same college. Same CGPA.</a:t>
+            </a:r>
+          </a:p>
+          <a:p>
+            <a:r>
+              <a:rPr lang="en-US" sz="1200" b="0" kern="1200" dirty="0">
+                <a:solidFill>
+                  <a:schemeClr val="tx1"/>
+                </a:solidFill>
+                <a:effectLst/>
+                <a:latin typeface="+mn-lt"/>
+                <a:ea typeface="+mn-ea"/>
+                <a:cs typeface="+mn-cs"/>
+              </a:rPr>
+              <a:t>&gt; Student A has nothing online.</a:t>
+            </a:r>
+          </a:p>
+          <a:p>
+            <a:r>
+              <a:rPr lang="en-US" sz="1200" b="0" kern="1200" dirty="0">
+                <a:solidFill>
+                  <a:schemeClr val="tx1"/>
+                </a:solidFill>
+                <a:effectLst/>
+                <a:latin typeface="+mn-lt"/>
+                <a:ea typeface="+mn-ea"/>
+                <a:cs typeface="+mn-cs"/>
+              </a:rPr>
+              <a:t>&gt; Student B has LinkedIn, GitHub, and a portfolio.</a:t>
+            </a:r>
+          </a:p>
+          <a:p>
+            <a:r>
+              <a:rPr lang="en-US" sz="1200" b="0" kern="1200" dirty="0">
+                <a:solidFill>
+                  <a:schemeClr val="tx1"/>
+                </a:solidFill>
+                <a:effectLst/>
+                <a:latin typeface="+mn-lt"/>
+                <a:ea typeface="+mn-ea"/>
+                <a:cs typeface="+mn-cs"/>
+              </a:rPr>
+              <a:t>&gt; Who gets the call?"</a:t>
+            </a:r>
+          </a:p>
+          <a:p>
+            <a:br>
+              <a:rPr lang="en-US" sz="1200" b="0" kern="1200" dirty="0">
+                <a:solidFill>
+                  <a:schemeClr val="tx1"/>
+                </a:solidFill>
+                <a:effectLst/>
+                <a:latin typeface="+mn-lt"/>
+                <a:ea typeface="+mn-ea"/>
+                <a:cs typeface="+mn-cs"/>
+              </a:rPr>
+            </a:br>
+            <a:endParaRPr lang="en-US" sz="1200" b="0" kern="1200" dirty="0">
+              <a:solidFill>
+                <a:schemeClr val="tx1"/>
+              </a:solidFill>
+              <a:effectLst/>
+              <a:latin typeface="+mn-lt"/>
+              <a:ea typeface="+mn-ea"/>
+              <a:cs typeface="+mn-cs"/>
+            </a:endParaRPr>
+          </a:p>
+          <a:p>
+            <a:r>
+              <a:rPr lang="en-US" sz="1200" b="1" kern="1200" dirty="0">
+                <a:solidFill>
+                  <a:schemeClr val="tx1"/>
+                </a:solidFill>
+                <a:effectLst/>
+                <a:latin typeface="+mn-lt"/>
+                <a:ea typeface="+mn-ea"/>
+                <a:cs typeface="+mn-cs"/>
+              </a:rPr>
+              <a:t>**Show of hands:**</a:t>
+            </a:r>
+            <a:r>
+              <a:rPr lang="en-US" sz="1200" b="0" kern="1200" dirty="0">
+                <a:solidFill>
+                  <a:schemeClr val="tx1"/>
+                </a:solidFill>
+                <a:effectLst/>
+                <a:latin typeface="+mn-lt"/>
+                <a:ea typeface="+mn-ea"/>
+                <a:cs typeface="+mn-cs"/>
+              </a:rPr>
+              <a:t> "How many have a LinkedIn? Updated in last 3 months? Any portfolio online?"</a:t>
+            </a:r>
+          </a:p>
+          <a:p>
+            <a:endParaRPr lang="en-IN" dirty="0"/>
+          </a:p>
+        </p:txBody>
+      </p:sp>
+      <p:sp>
+        <p:nvSpPr>
+          <p:cNvPr id="4" name="Slide Number Placeholder 3"/>
+          <p:cNvSpPr>
+            <a:spLocks noGrp="1"/>
+          </p:cNvSpPr>
+          <p:nvPr>
+            <p:ph type="sldNum" sz="quarter" idx="5"/>
+          </p:nvPr>
+        </p:nvSpPr>
+        <p:spPr/>
+        <p:txBody>
+          <a:bodyPr/>
+          <a:lstStyle/>
+          <a:p>
+            <a:fld id="{0F820492-BEBC-4334-926F-386A19F3356A}" type="slidenum">
+              <a:rPr lang="en-IN" smtClean="0"/>
+              <a:t>2</a:t>
+            </a:fld>
+            <a:endParaRPr lang="en-IN"/>
+          </a:p>
+        </p:txBody>
+      </p:sp>
+    </p:spTree>
+    <p:extLst>
+      <p:ext uri="{BB962C8B-B14F-4D97-AF65-F5344CB8AC3E}">
+        <p14:creationId xmlns:p14="http://schemas.microsoft.com/office/powerpoint/2010/main" val="2198245873"/>
+      </p:ext>
+    </p:extLst>
+  </p:cSld>
+  <p:clrMapOvr>
+    <a:masterClrMapping/>
+  </p:clrMapOvr>
+</p:notes>
+</file>
+
+<file path=ppt/notesSlides/notesSlide2.xml><?xml version="1.0" encoding="utf-8"?>
+<p:notes xmlns:a="http://schemas.openxmlformats.org/drawingml/2006/main" xmlns:r="http://schemas.openxmlformats.org/officeDocument/2006/relationships" xmlns:p="http://schemas.openxmlformats.org/presentationml/2006/main">
+  <p:cSld>
+    <p:spTree>
+      <p:nvGrpSpPr>
+        <p:cNvPr id="1" name=""/>
+        <p:cNvGrpSpPr/>
+        <p:nvPr/>
+      </p:nvGrpSpPr>
+      <p:grpSpPr>
+        <a:xfrm>
+          <a:off x="0" y="0"/>
+          <a:ext cx="0" cy="0"/>
+          <a:chOff x="0" y="0"/>
+          <a:chExt cx="0" cy="0"/>
+        </a:xfrm>
+      </p:grpSpPr>
+      <p:sp>
+        <p:nvSpPr>
+          <p:cNvPr id="2" name="Slide Image Placeholder 1"/>
+          <p:cNvSpPr>
+            <a:spLocks noGrp="1" noRot="1" noChangeAspect="1"/>
+          </p:cNvSpPr>
+          <p:nvPr>
+            <p:ph type="sldImg"/>
+          </p:nvPr>
+        </p:nvSpPr>
+        <p:spPr/>
+      </p:sp>
+      <p:sp>
+        <p:nvSpPr>
+          <p:cNvPr id="3" name="Notes Placeholder 2"/>
+          <p:cNvSpPr>
+            <a:spLocks noGrp="1"/>
+          </p:cNvSpPr>
+          <p:nvPr>
+            <p:ph type="body" idx="1"/>
+          </p:nvPr>
+        </p:nvSpPr>
+        <p:spPr/>
+        <p:txBody>
+          <a:bodyPr/>
+          <a:lstStyle/>
+          <a:p>
+            <a:r>
+              <a:rPr lang="en-IN" sz="1200" b="0" kern="1200" dirty="0">
+                <a:solidFill>
+                  <a:schemeClr val="tx1"/>
+                </a:solidFill>
+                <a:effectLst/>
+                <a:latin typeface="+mn-lt"/>
+                <a:ea typeface="+mn-ea"/>
+                <a:cs typeface="+mn-cs"/>
+              </a:rPr>
+              <a:t>| Platform | Best For | Who Checks It |</a:t>
+            </a:r>
+          </a:p>
+          <a:p>
+            <a:r>
+              <a:rPr lang="en-IN" sz="1200" b="0" kern="1200" dirty="0">
+                <a:solidFill>
+                  <a:schemeClr val="tx1"/>
+                </a:solidFill>
+                <a:effectLst/>
+                <a:latin typeface="+mn-lt"/>
+                <a:ea typeface="+mn-ea"/>
+                <a:cs typeface="+mn-cs"/>
+              </a:rPr>
+              <a:t>|----------|----------|---------------|</a:t>
+            </a:r>
+          </a:p>
+          <a:p>
+            <a:r>
+              <a:rPr lang="en-IN" sz="1200" b="0" kern="1200" dirty="0">
+                <a:solidFill>
+                  <a:schemeClr val="tx1"/>
+                </a:solidFill>
+                <a:effectLst/>
+                <a:latin typeface="+mn-lt"/>
+                <a:ea typeface="+mn-ea"/>
+                <a:cs typeface="+mn-cs"/>
+              </a:rPr>
+              <a:t>| </a:t>
+            </a:r>
+            <a:r>
+              <a:rPr lang="en-IN" sz="1200" b="1" kern="1200" dirty="0">
+                <a:solidFill>
+                  <a:schemeClr val="tx1"/>
+                </a:solidFill>
+                <a:effectLst/>
+                <a:latin typeface="+mn-lt"/>
+                <a:ea typeface="+mn-ea"/>
+                <a:cs typeface="+mn-cs"/>
+              </a:rPr>
+              <a:t>**LinkedIn**</a:t>
+            </a:r>
+            <a:r>
+              <a:rPr lang="en-IN" sz="1200" b="0" kern="1200" dirty="0">
+                <a:solidFill>
+                  <a:schemeClr val="tx1"/>
+                </a:solidFill>
+                <a:effectLst/>
+                <a:latin typeface="+mn-lt"/>
+                <a:ea typeface="+mn-ea"/>
+                <a:cs typeface="+mn-cs"/>
+              </a:rPr>
+              <a:t> | Professional identity | Recruiters, HR, clients |</a:t>
+            </a:r>
+          </a:p>
+          <a:p>
+            <a:r>
+              <a:rPr lang="en-IN" sz="1200" b="0" kern="1200" dirty="0">
+                <a:solidFill>
+                  <a:schemeClr val="tx1"/>
+                </a:solidFill>
+                <a:effectLst/>
+                <a:latin typeface="+mn-lt"/>
+                <a:ea typeface="+mn-ea"/>
+                <a:cs typeface="+mn-cs"/>
+              </a:rPr>
+              <a:t>| </a:t>
+            </a:r>
+            <a:r>
+              <a:rPr lang="en-IN" sz="1200" b="1" kern="1200" dirty="0">
+                <a:solidFill>
+                  <a:schemeClr val="tx1"/>
+                </a:solidFill>
+                <a:effectLst/>
+                <a:latin typeface="+mn-lt"/>
+                <a:ea typeface="+mn-ea"/>
+                <a:cs typeface="+mn-cs"/>
+              </a:rPr>
+              <a:t>**GitHub**</a:t>
+            </a:r>
+            <a:r>
+              <a:rPr lang="en-IN" sz="1200" b="0" kern="1200" dirty="0">
+                <a:solidFill>
+                  <a:schemeClr val="tx1"/>
+                </a:solidFill>
+                <a:effectLst/>
+                <a:latin typeface="+mn-lt"/>
+                <a:ea typeface="+mn-ea"/>
+                <a:cs typeface="+mn-cs"/>
+              </a:rPr>
+              <a:t> | Code &amp; projects | Tech recruiters, developers |</a:t>
+            </a:r>
+          </a:p>
+          <a:p>
+            <a:r>
+              <a:rPr lang="en-IN" sz="1200" b="0" kern="1200" dirty="0">
+                <a:solidFill>
+                  <a:schemeClr val="tx1"/>
+                </a:solidFill>
+                <a:effectLst/>
+                <a:latin typeface="+mn-lt"/>
+                <a:ea typeface="+mn-ea"/>
+                <a:cs typeface="+mn-cs"/>
+              </a:rPr>
+              <a:t>| </a:t>
+            </a:r>
+            <a:r>
+              <a:rPr lang="en-IN" sz="1200" b="1" kern="1200" dirty="0">
+                <a:solidFill>
+                  <a:schemeClr val="tx1"/>
+                </a:solidFill>
+                <a:effectLst/>
+                <a:latin typeface="+mn-lt"/>
+                <a:ea typeface="+mn-ea"/>
+                <a:cs typeface="+mn-cs"/>
+              </a:rPr>
+              <a:t>**Portfolio Website**</a:t>
+            </a:r>
+            <a:r>
+              <a:rPr lang="en-IN" sz="1200" b="0" kern="1200" dirty="0">
+                <a:solidFill>
+                  <a:schemeClr val="tx1"/>
+                </a:solidFill>
+                <a:effectLst/>
+                <a:latin typeface="+mn-lt"/>
+                <a:ea typeface="+mn-ea"/>
+                <a:cs typeface="+mn-cs"/>
+              </a:rPr>
+              <a:t> | Your brand, your way | Everyone who Googles you |</a:t>
+            </a:r>
+          </a:p>
+          <a:p>
+            <a:r>
+              <a:rPr lang="en-IN" sz="1200" b="0" kern="1200" dirty="0">
+                <a:solidFill>
+                  <a:schemeClr val="tx1"/>
+                </a:solidFill>
+                <a:effectLst/>
+                <a:latin typeface="+mn-lt"/>
+                <a:ea typeface="+mn-ea"/>
+                <a:cs typeface="+mn-cs"/>
+              </a:rPr>
+              <a:t>| </a:t>
+            </a:r>
+            <a:r>
+              <a:rPr lang="en-IN" sz="1200" b="1" kern="1200" dirty="0">
+                <a:solidFill>
+                  <a:schemeClr val="tx1"/>
+                </a:solidFill>
+                <a:effectLst/>
+                <a:latin typeface="+mn-lt"/>
+                <a:ea typeface="+mn-ea"/>
+                <a:cs typeface="+mn-cs"/>
+              </a:rPr>
+              <a:t>**</a:t>
+            </a:r>
+            <a:r>
+              <a:rPr lang="en-IN" sz="1200" b="1" kern="1200" dirty="0" err="1">
+                <a:solidFill>
+                  <a:schemeClr val="tx1"/>
+                </a:solidFill>
+                <a:effectLst/>
+                <a:latin typeface="+mn-lt"/>
+                <a:ea typeface="+mn-ea"/>
+                <a:cs typeface="+mn-cs"/>
+              </a:rPr>
+              <a:t>Behance</a:t>
+            </a:r>
+            <a:r>
+              <a:rPr lang="en-IN" sz="1200" b="1" kern="1200" dirty="0">
+                <a:solidFill>
+                  <a:schemeClr val="tx1"/>
+                </a:solidFill>
+                <a:effectLst/>
+                <a:latin typeface="+mn-lt"/>
+                <a:ea typeface="+mn-ea"/>
+                <a:cs typeface="+mn-cs"/>
+              </a:rPr>
+              <a:t>/</a:t>
+            </a:r>
+            <a:r>
+              <a:rPr lang="en-IN" sz="1200" b="1" kern="1200" dirty="0" err="1">
+                <a:solidFill>
+                  <a:schemeClr val="tx1"/>
+                </a:solidFill>
+                <a:effectLst/>
+                <a:latin typeface="+mn-lt"/>
+                <a:ea typeface="+mn-ea"/>
+                <a:cs typeface="+mn-cs"/>
+              </a:rPr>
+              <a:t>Dribbble</a:t>
+            </a:r>
+            <a:r>
+              <a:rPr lang="en-IN" sz="1200" b="1" kern="1200" dirty="0">
+                <a:solidFill>
+                  <a:schemeClr val="tx1"/>
+                </a:solidFill>
+                <a:effectLst/>
+                <a:latin typeface="+mn-lt"/>
+                <a:ea typeface="+mn-ea"/>
+                <a:cs typeface="+mn-cs"/>
+              </a:rPr>
+              <a:t>**</a:t>
+            </a:r>
+            <a:r>
+              <a:rPr lang="en-IN" sz="1200" b="0" kern="1200" dirty="0">
+                <a:solidFill>
+                  <a:schemeClr val="tx1"/>
+                </a:solidFill>
+                <a:effectLst/>
+                <a:latin typeface="+mn-lt"/>
+                <a:ea typeface="+mn-ea"/>
+                <a:cs typeface="+mn-cs"/>
+              </a:rPr>
+              <a:t> | Design &amp; visual work | Design agencies, clients |</a:t>
+            </a:r>
+          </a:p>
+          <a:p>
+            <a:r>
+              <a:rPr lang="en-IN" sz="1200" b="0" kern="1200" dirty="0">
+                <a:solidFill>
+                  <a:schemeClr val="tx1"/>
+                </a:solidFill>
+                <a:effectLst/>
+                <a:latin typeface="+mn-lt"/>
+                <a:ea typeface="+mn-ea"/>
+                <a:cs typeface="+mn-cs"/>
+              </a:rPr>
+              <a:t>| </a:t>
+            </a:r>
+            <a:r>
+              <a:rPr lang="en-IN" sz="1200" b="1" kern="1200" dirty="0">
+                <a:solidFill>
+                  <a:schemeClr val="tx1"/>
+                </a:solidFill>
+                <a:effectLst/>
+                <a:latin typeface="+mn-lt"/>
+                <a:ea typeface="+mn-ea"/>
+                <a:cs typeface="+mn-cs"/>
+              </a:rPr>
+              <a:t>**Notion Portfolio**</a:t>
+            </a:r>
+            <a:r>
+              <a:rPr lang="en-IN" sz="1200" b="0" kern="1200" dirty="0">
+                <a:solidFill>
+                  <a:schemeClr val="tx1"/>
+                </a:solidFill>
+                <a:effectLst/>
+                <a:latin typeface="+mn-lt"/>
+                <a:ea typeface="+mn-ea"/>
+                <a:cs typeface="+mn-cs"/>
+              </a:rPr>
+              <a:t> | Case studies, projects | Freelance clients, interviewers |</a:t>
+            </a:r>
+          </a:p>
+          <a:p>
+            <a:br>
+              <a:rPr lang="en-IN" sz="1200" b="0" kern="1200" dirty="0">
+                <a:solidFill>
+                  <a:schemeClr val="tx1"/>
+                </a:solidFill>
+                <a:effectLst/>
+                <a:latin typeface="+mn-lt"/>
+                <a:ea typeface="+mn-ea"/>
+                <a:cs typeface="+mn-cs"/>
+              </a:rPr>
+            </a:br>
+            <a:endParaRPr lang="en-IN" sz="1200" b="0" kern="1200" dirty="0">
+              <a:solidFill>
+                <a:schemeClr val="tx1"/>
+              </a:solidFill>
+              <a:effectLst/>
+              <a:latin typeface="+mn-lt"/>
+              <a:ea typeface="+mn-ea"/>
+              <a:cs typeface="+mn-cs"/>
+            </a:endParaRPr>
+          </a:p>
+          <a:p>
+            <a:r>
+              <a:rPr lang="en-IN" sz="1200" b="0" i="1" kern="1200" dirty="0">
+                <a:solidFill>
+                  <a:schemeClr val="tx1"/>
+                </a:solidFill>
+                <a:effectLst/>
+                <a:latin typeface="+mn-lt"/>
+                <a:ea typeface="+mn-ea"/>
+                <a:cs typeface="+mn-cs"/>
+              </a:rPr>
+              <a:t>*"You don't need all of these. But you need at least one. Today we start with the two most important: LinkedIn and your Resume."*</a:t>
+            </a:r>
+            <a:endParaRPr lang="en-IN" sz="1200" b="0" kern="1200" dirty="0">
+              <a:solidFill>
+                <a:schemeClr val="tx1"/>
+              </a:solidFill>
+              <a:effectLst/>
+              <a:latin typeface="+mn-lt"/>
+              <a:ea typeface="+mn-ea"/>
+              <a:cs typeface="+mn-cs"/>
+            </a:endParaRPr>
+          </a:p>
+          <a:p>
+            <a:endParaRPr lang="en-IN" dirty="0"/>
+          </a:p>
+        </p:txBody>
+      </p:sp>
+      <p:sp>
+        <p:nvSpPr>
+          <p:cNvPr id="4" name="Slide Number Placeholder 3"/>
+          <p:cNvSpPr>
+            <a:spLocks noGrp="1"/>
+          </p:cNvSpPr>
+          <p:nvPr>
+            <p:ph type="sldNum" sz="quarter" idx="5"/>
+          </p:nvPr>
+        </p:nvSpPr>
+        <p:spPr/>
+        <p:txBody>
+          <a:bodyPr/>
+          <a:lstStyle/>
+          <a:p>
+            <a:fld id="{0F820492-BEBC-4334-926F-386A19F3356A}" type="slidenum">
+              <a:rPr lang="en-IN" smtClean="0"/>
+              <a:t>3</a:t>
+            </a:fld>
+            <a:endParaRPr lang="en-IN"/>
+          </a:p>
+        </p:txBody>
+      </p:sp>
+    </p:spTree>
+    <p:extLst>
+      <p:ext uri="{BB962C8B-B14F-4D97-AF65-F5344CB8AC3E}">
+        <p14:creationId xmlns:p14="http://schemas.microsoft.com/office/powerpoint/2010/main" val="2119021134"/>
+      </p:ext>
+    </p:extLst>
+  </p:cSld>
+  <p:clrMapOvr>
+    <a:masterClrMapping/>
+  </p:clrMapOvr>
+</p:notes>
+</file>
+
+<file path=ppt/notesSlides/notesSlide3.xml><?xml version="1.0" encoding="utf-8"?>
+<p:notes xmlns:a="http://schemas.openxmlformats.org/drawingml/2006/main" xmlns:r="http://schemas.openxmlformats.org/officeDocument/2006/relationships" xmlns:p="http://schemas.openxmlformats.org/presentationml/2006/main">
+  <p:cSld>
+    <p:spTree>
+      <p:nvGrpSpPr>
+        <p:cNvPr id="1" name=""/>
+        <p:cNvGrpSpPr/>
+        <p:nvPr/>
+      </p:nvGrpSpPr>
+      <p:grpSpPr>
+        <a:xfrm>
+          <a:off x="0" y="0"/>
+          <a:ext cx="0" cy="0"/>
+          <a:chOff x="0" y="0"/>
+          <a:chExt cx="0" cy="0"/>
+        </a:xfrm>
+      </p:grpSpPr>
+      <p:sp>
+        <p:nvSpPr>
+          <p:cNvPr id="2" name="Slide Image Placeholder 1"/>
+          <p:cNvSpPr>
+            <a:spLocks noGrp="1" noRot="1" noChangeAspect="1"/>
+          </p:cNvSpPr>
+          <p:nvPr>
+            <p:ph type="sldImg"/>
+          </p:nvPr>
+        </p:nvSpPr>
+        <p:spPr/>
+      </p:sp>
+      <p:sp>
+        <p:nvSpPr>
+          <p:cNvPr id="3" name="Notes Placeholder 2"/>
+          <p:cNvSpPr>
+            <a:spLocks noGrp="1"/>
+          </p:cNvSpPr>
+          <p:nvPr>
+            <p:ph type="body" idx="1"/>
+          </p:nvPr>
+        </p:nvSpPr>
+        <p:spPr/>
+        <p:txBody>
+          <a:bodyPr/>
+          <a:lstStyle/>
+          <a:p>
+            <a:r>
+              <a:rPr lang="en-US" sz="1200" b="1" kern="1200" dirty="0">
+                <a:solidFill>
+                  <a:schemeClr val="tx1"/>
+                </a:solidFill>
+                <a:effectLst/>
+                <a:latin typeface="+mn-lt"/>
+                <a:ea typeface="+mn-ea"/>
+                <a:cs typeface="+mn-cs"/>
+              </a:rPr>
+              <a:t>**For:**</a:t>
+            </a:r>
+            <a:r>
+              <a:rPr lang="en-US" sz="1200" b="0" kern="1200" dirty="0">
+                <a:solidFill>
+                  <a:schemeClr val="tx1"/>
+                </a:solidFill>
+                <a:effectLst/>
+                <a:latin typeface="+mn-lt"/>
+                <a:ea typeface="+mn-ea"/>
+                <a:cs typeface="+mn-cs"/>
+              </a:rPr>
+              <a:t> Python students, anyone who codes</a:t>
+            </a:r>
+          </a:p>
+          <a:p>
+            <a:br>
+              <a:rPr lang="en-US" sz="1200" b="0" kern="1200" dirty="0">
+                <a:solidFill>
+                  <a:schemeClr val="tx1"/>
+                </a:solidFill>
+                <a:effectLst/>
+                <a:latin typeface="+mn-lt"/>
+                <a:ea typeface="+mn-ea"/>
+                <a:cs typeface="+mn-cs"/>
+              </a:rPr>
+            </a:br>
+            <a:endParaRPr lang="en-US" sz="1200" b="0" kern="1200" dirty="0">
+              <a:solidFill>
+                <a:schemeClr val="tx1"/>
+              </a:solidFill>
+              <a:effectLst/>
+              <a:latin typeface="+mn-lt"/>
+              <a:ea typeface="+mn-ea"/>
+              <a:cs typeface="+mn-cs"/>
+            </a:endParaRPr>
+          </a:p>
+          <a:p>
+            <a:r>
+              <a:rPr lang="en-US" sz="1200" b="0" kern="1200" dirty="0">
+                <a:solidFill>
+                  <a:schemeClr val="tx1"/>
+                </a:solidFill>
+                <a:effectLst/>
+                <a:latin typeface="+mn-lt"/>
+                <a:ea typeface="+mn-ea"/>
+                <a:cs typeface="+mn-cs"/>
+              </a:rPr>
+              <a:t>- GitHub = your code portfolio, like Instagram but for builders</a:t>
+            </a:r>
+          </a:p>
+          <a:p>
+            <a:r>
+              <a:rPr lang="en-US" sz="1200" b="0" kern="1200" dirty="0">
+                <a:solidFill>
+                  <a:schemeClr val="tx1"/>
+                </a:solidFill>
+                <a:effectLst/>
+                <a:latin typeface="+mn-lt"/>
+                <a:ea typeface="+mn-ea"/>
+                <a:cs typeface="+mn-cs"/>
+              </a:rPr>
+              <a:t>- Profile README = your landing page on GitHub</a:t>
+            </a:r>
+          </a:p>
+          <a:p>
+            <a:r>
+              <a:rPr lang="en-US" sz="1200" b="0" kern="1200" dirty="0">
+                <a:solidFill>
+                  <a:schemeClr val="tx1"/>
+                </a:solidFill>
+                <a:effectLst/>
+                <a:latin typeface="+mn-lt"/>
+                <a:ea typeface="+mn-ea"/>
+                <a:cs typeface="+mn-cs"/>
+              </a:rPr>
+              <a:t>- Green contribution graph = proof you're active and consistent</a:t>
+            </a:r>
+          </a:p>
+          <a:p>
+            <a:r>
+              <a:rPr lang="en-US" sz="1200" b="0" kern="1200" dirty="0">
+                <a:solidFill>
+                  <a:schemeClr val="tx1"/>
+                </a:solidFill>
+                <a:effectLst/>
+                <a:latin typeface="+mn-lt"/>
+                <a:ea typeface="+mn-ea"/>
+                <a:cs typeface="+mn-cs"/>
+              </a:rPr>
+              <a:t>- Good READMEs on repos = professionalism</a:t>
+            </a:r>
+          </a:p>
+          <a:p>
+            <a:r>
+              <a:rPr lang="en-US" sz="1200" b="0" kern="1200" dirty="0">
+                <a:solidFill>
+                  <a:schemeClr val="tx1"/>
+                </a:solidFill>
+                <a:effectLst/>
+                <a:latin typeface="+mn-lt"/>
+                <a:ea typeface="+mn-ea"/>
+                <a:cs typeface="+mn-cs"/>
+              </a:rPr>
+              <a:t>- 100M+ developers use it, recruiters check it before interviews</a:t>
+            </a:r>
+          </a:p>
+          <a:p>
+            <a:br>
+              <a:rPr lang="en-US" sz="1200" b="0" kern="1200" dirty="0">
+                <a:solidFill>
+                  <a:schemeClr val="tx1"/>
+                </a:solidFill>
+                <a:effectLst/>
+                <a:latin typeface="+mn-lt"/>
+                <a:ea typeface="+mn-ea"/>
+                <a:cs typeface="+mn-cs"/>
+              </a:rPr>
+            </a:br>
+            <a:endParaRPr lang="en-US" sz="1200" b="0" kern="1200" dirty="0">
+              <a:solidFill>
+                <a:schemeClr val="tx1"/>
+              </a:solidFill>
+              <a:effectLst/>
+              <a:latin typeface="+mn-lt"/>
+              <a:ea typeface="+mn-ea"/>
+              <a:cs typeface="+mn-cs"/>
+            </a:endParaRPr>
+          </a:p>
+          <a:p>
+            <a:r>
+              <a:rPr lang="en-US" sz="1200" b="1" kern="1200" dirty="0">
+                <a:solidFill>
+                  <a:schemeClr val="tx1"/>
+                </a:solidFill>
+                <a:effectLst/>
+                <a:latin typeface="+mn-lt"/>
+                <a:ea typeface="+mn-ea"/>
+                <a:cs typeface="+mn-cs"/>
+              </a:rPr>
+              <a:t>**Show:**</a:t>
+            </a:r>
+            <a:r>
+              <a:rPr lang="en-US" sz="1200" b="0" kern="1200" dirty="0">
+                <a:solidFill>
+                  <a:schemeClr val="tx1"/>
+                </a:solidFill>
+                <a:effectLst/>
+                <a:latin typeface="+mn-lt"/>
+                <a:ea typeface="+mn-ea"/>
+                <a:cs typeface="+mn-cs"/>
+              </a:rPr>
+              <a:t> A real GitHub profile with profile README and 5+ repos.</a:t>
+            </a:r>
+          </a:p>
+          <a:p>
+            <a:br>
+              <a:rPr lang="en-US" sz="1200" b="0" kern="1200" dirty="0">
+                <a:solidFill>
+                  <a:schemeClr val="tx1"/>
+                </a:solidFill>
+                <a:effectLst/>
+                <a:latin typeface="+mn-lt"/>
+                <a:ea typeface="+mn-ea"/>
+                <a:cs typeface="+mn-cs"/>
+              </a:rPr>
+            </a:br>
+            <a:endParaRPr lang="en-US" sz="1200" b="0" kern="1200" dirty="0">
+              <a:solidFill>
+                <a:schemeClr val="tx1"/>
+              </a:solidFill>
+              <a:effectLst/>
+              <a:latin typeface="+mn-lt"/>
+              <a:ea typeface="+mn-ea"/>
+              <a:cs typeface="+mn-cs"/>
+            </a:endParaRPr>
+          </a:p>
+          <a:p>
+            <a:r>
+              <a:rPr lang="en-US" sz="1200" b="0" i="1" kern="1200" dirty="0">
+                <a:solidFill>
+                  <a:schemeClr val="tx1"/>
+                </a:solidFill>
+                <a:effectLst/>
+                <a:latin typeface="+mn-lt"/>
+                <a:ea typeface="+mn-ea"/>
+                <a:cs typeface="+mn-cs"/>
+              </a:rPr>
+              <a:t>*"If you code, GitHub is non-negotiable. We have a separate hands-on session for this."*</a:t>
+            </a:r>
+            <a:endParaRPr lang="en-US" sz="1200" b="0" kern="1200" dirty="0">
+              <a:solidFill>
+                <a:schemeClr val="tx1"/>
+              </a:solidFill>
+              <a:effectLst/>
+              <a:latin typeface="+mn-lt"/>
+              <a:ea typeface="+mn-ea"/>
+              <a:cs typeface="+mn-cs"/>
+            </a:endParaRPr>
+          </a:p>
+          <a:p>
+            <a:endParaRPr lang="en-IN" dirty="0"/>
+          </a:p>
+        </p:txBody>
+      </p:sp>
+      <p:sp>
+        <p:nvSpPr>
+          <p:cNvPr id="4" name="Slide Number Placeholder 3"/>
+          <p:cNvSpPr>
+            <a:spLocks noGrp="1"/>
+          </p:cNvSpPr>
+          <p:nvPr>
+            <p:ph type="sldNum" sz="quarter" idx="5"/>
+          </p:nvPr>
+        </p:nvSpPr>
+        <p:spPr/>
+        <p:txBody>
+          <a:bodyPr/>
+          <a:lstStyle/>
+          <a:p>
+            <a:fld id="{0F820492-BEBC-4334-926F-386A19F3356A}" type="slidenum">
+              <a:rPr lang="en-IN" smtClean="0"/>
+              <a:t>5</a:t>
+            </a:fld>
+            <a:endParaRPr lang="en-IN"/>
+          </a:p>
+        </p:txBody>
+      </p:sp>
+    </p:spTree>
+    <p:extLst>
+      <p:ext uri="{BB962C8B-B14F-4D97-AF65-F5344CB8AC3E}">
+        <p14:creationId xmlns:p14="http://schemas.microsoft.com/office/powerpoint/2010/main" val="266465563"/>
+      </p:ext>
+    </p:extLst>
+  </p:cSld>
+  <p:clrMapOvr>
+    <a:masterClrMapping/>
+  </p:clrMapOvr>
+</p:notes>
+</file>
+
+<file path=ppt/notesSlides/notesSlide4.xml><?xml version="1.0" encoding="utf-8"?>
+<p:notes xmlns:a="http://schemas.openxmlformats.org/drawingml/2006/main" xmlns:r="http://schemas.openxmlformats.org/officeDocument/2006/relationships" xmlns:p="http://schemas.openxmlformats.org/presentationml/2006/main">
+  <p:cSld>
+    <p:spTree>
+      <p:nvGrpSpPr>
+        <p:cNvPr id="1" name=""/>
+        <p:cNvGrpSpPr/>
+        <p:nvPr/>
+      </p:nvGrpSpPr>
+      <p:grpSpPr>
+        <a:xfrm>
+          <a:off x="0" y="0"/>
+          <a:ext cx="0" cy="0"/>
+          <a:chOff x="0" y="0"/>
+          <a:chExt cx="0" cy="0"/>
+        </a:xfrm>
+      </p:grpSpPr>
+      <p:sp>
+        <p:nvSpPr>
+          <p:cNvPr id="2" name="Slide Image Placeholder 1"/>
+          <p:cNvSpPr>
+            <a:spLocks noGrp="1" noRot="1" noChangeAspect="1"/>
+          </p:cNvSpPr>
+          <p:nvPr>
+            <p:ph type="sldImg"/>
+          </p:nvPr>
+        </p:nvSpPr>
+        <p:spPr/>
+      </p:sp>
+      <p:sp>
+        <p:nvSpPr>
+          <p:cNvPr id="3" name="Notes Placeholder 2"/>
+          <p:cNvSpPr>
+            <a:spLocks noGrp="1"/>
+          </p:cNvSpPr>
+          <p:nvPr>
+            <p:ph type="body" idx="1"/>
+          </p:nvPr>
+        </p:nvSpPr>
+        <p:spPr/>
+        <p:txBody>
+          <a:bodyPr/>
+          <a:lstStyle/>
+          <a:p>
+            <a:r>
+              <a:rPr lang="en-IN" sz="1200" b="1" kern="1200" dirty="0">
+                <a:solidFill>
+                  <a:schemeClr val="tx1"/>
+                </a:solidFill>
+                <a:effectLst/>
+                <a:latin typeface="+mn-lt"/>
+                <a:ea typeface="+mn-ea"/>
+                <a:cs typeface="+mn-cs"/>
+              </a:rPr>
+              <a:t>**For:**</a:t>
+            </a:r>
+            <a:r>
+              <a:rPr lang="en-IN" sz="1200" b="0" kern="1200" dirty="0">
+                <a:solidFill>
+                  <a:schemeClr val="tx1"/>
+                </a:solidFill>
+                <a:effectLst/>
+                <a:latin typeface="+mn-lt"/>
+                <a:ea typeface="+mn-ea"/>
+                <a:cs typeface="+mn-cs"/>
+              </a:rPr>
+              <a:t> Everyone, especially DM and Graphics students</a:t>
+            </a:r>
+          </a:p>
+          <a:p>
+            <a:br>
+              <a:rPr lang="en-IN" sz="1200" b="0" kern="1200" dirty="0">
+                <a:solidFill>
+                  <a:schemeClr val="tx1"/>
+                </a:solidFill>
+                <a:effectLst/>
+                <a:latin typeface="+mn-lt"/>
+                <a:ea typeface="+mn-ea"/>
+                <a:cs typeface="+mn-cs"/>
+              </a:rPr>
+            </a:br>
+            <a:endParaRPr lang="en-IN" sz="1200" b="0" kern="1200" dirty="0">
+              <a:solidFill>
+                <a:schemeClr val="tx1"/>
+              </a:solidFill>
+              <a:effectLst/>
+              <a:latin typeface="+mn-lt"/>
+              <a:ea typeface="+mn-ea"/>
+              <a:cs typeface="+mn-cs"/>
+            </a:endParaRPr>
+          </a:p>
+          <a:p>
+            <a:r>
+              <a:rPr lang="en-IN" sz="1200" b="0" kern="1200" dirty="0">
+                <a:solidFill>
+                  <a:schemeClr val="tx1"/>
+                </a:solidFill>
+                <a:effectLst/>
+                <a:latin typeface="+mn-lt"/>
+                <a:ea typeface="+mn-ea"/>
+                <a:cs typeface="+mn-cs"/>
+              </a:rPr>
+              <a:t>Options available (free or cheap):</a:t>
+            </a:r>
+          </a:p>
+          <a:p>
+            <a:r>
+              <a:rPr lang="en-IN" sz="1200" b="0" kern="1200" dirty="0">
+                <a:solidFill>
+                  <a:schemeClr val="tx1"/>
+                </a:solidFill>
+                <a:effectLst/>
+                <a:latin typeface="+mn-lt"/>
+                <a:ea typeface="+mn-ea"/>
+                <a:cs typeface="+mn-cs"/>
+              </a:rPr>
+              <a:t>| Platform | Effort | Best For |</a:t>
+            </a:r>
+          </a:p>
+          <a:p>
+            <a:r>
+              <a:rPr lang="en-IN" sz="1200" b="0" kern="1200" dirty="0">
+                <a:solidFill>
+                  <a:schemeClr val="tx1"/>
+                </a:solidFill>
+                <a:effectLst/>
+                <a:latin typeface="+mn-lt"/>
+                <a:ea typeface="+mn-ea"/>
+                <a:cs typeface="+mn-cs"/>
+              </a:rPr>
+              <a:t>|----------|--------|----------|</a:t>
+            </a:r>
+          </a:p>
+          <a:p>
+            <a:r>
+              <a:rPr lang="en-IN" sz="1200" b="0" kern="1200" dirty="0">
+                <a:solidFill>
+                  <a:schemeClr val="tx1"/>
+                </a:solidFill>
+                <a:effectLst/>
+                <a:latin typeface="+mn-lt"/>
+                <a:ea typeface="+mn-ea"/>
+                <a:cs typeface="+mn-cs"/>
+              </a:rPr>
+              <a:t>| </a:t>
+            </a:r>
+            <a:r>
+              <a:rPr lang="en-IN" sz="1200" b="1" kern="1200" dirty="0">
+                <a:solidFill>
+                  <a:schemeClr val="tx1"/>
+                </a:solidFill>
+                <a:effectLst/>
+                <a:latin typeface="+mn-lt"/>
+                <a:ea typeface="+mn-ea"/>
+                <a:cs typeface="+mn-cs"/>
+              </a:rPr>
+              <a:t>**Notion**</a:t>
+            </a:r>
+            <a:r>
+              <a:rPr lang="en-IN" sz="1200" b="0" kern="1200" dirty="0">
+                <a:solidFill>
+                  <a:schemeClr val="tx1"/>
+                </a:solidFill>
+                <a:effectLst/>
+                <a:latin typeface="+mn-lt"/>
+                <a:ea typeface="+mn-ea"/>
+                <a:cs typeface="+mn-cs"/>
+              </a:rPr>
+              <a:t> | Low -- no coding, free | Everyone, quick portfolio |</a:t>
+            </a:r>
+          </a:p>
+          <a:p>
+            <a:r>
+              <a:rPr lang="en-IN" sz="1200" b="0" kern="1200" dirty="0">
+                <a:solidFill>
+                  <a:schemeClr val="tx1"/>
+                </a:solidFill>
+                <a:effectLst/>
+                <a:latin typeface="+mn-lt"/>
+                <a:ea typeface="+mn-ea"/>
+                <a:cs typeface="+mn-cs"/>
+              </a:rPr>
+              <a:t>| </a:t>
+            </a:r>
+            <a:r>
+              <a:rPr lang="en-IN" sz="1200" b="1" kern="1200" dirty="0">
+                <a:solidFill>
+                  <a:schemeClr val="tx1"/>
+                </a:solidFill>
+                <a:effectLst/>
+                <a:latin typeface="+mn-lt"/>
+                <a:ea typeface="+mn-ea"/>
+                <a:cs typeface="+mn-cs"/>
+              </a:rPr>
+              <a:t>**Carrd.co**</a:t>
+            </a:r>
+            <a:r>
+              <a:rPr lang="en-IN" sz="1200" b="0" kern="1200" dirty="0">
+                <a:solidFill>
+                  <a:schemeClr val="tx1"/>
+                </a:solidFill>
+                <a:effectLst/>
+                <a:latin typeface="+mn-lt"/>
+                <a:ea typeface="+mn-ea"/>
+                <a:cs typeface="+mn-cs"/>
+              </a:rPr>
+              <a:t> | Low -- drag &amp; drop, free tier | Simple one-page site |</a:t>
+            </a:r>
+          </a:p>
+          <a:p>
+            <a:r>
+              <a:rPr lang="en-IN" sz="1200" b="0" kern="1200" dirty="0">
+                <a:solidFill>
+                  <a:schemeClr val="tx1"/>
+                </a:solidFill>
+                <a:effectLst/>
+                <a:latin typeface="+mn-lt"/>
+                <a:ea typeface="+mn-ea"/>
+                <a:cs typeface="+mn-cs"/>
+              </a:rPr>
+              <a:t>| </a:t>
+            </a:r>
+            <a:r>
+              <a:rPr lang="en-IN" sz="1200" b="1" kern="1200" dirty="0">
+                <a:solidFill>
+                  <a:schemeClr val="tx1"/>
+                </a:solidFill>
+                <a:effectLst/>
+                <a:latin typeface="+mn-lt"/>
+                <a:ea typeface="+mn-ea"/>
+                <a:cs typeface="+mn-cs"/>
+              </a:rPr>
+              <a:t>**GitHub Pages**</a:t>
+            </a:r>
+            <a:r>
+              <a:rPr lang="en-IN" sz="1200" b="0" kern="1200" dirty="0">
+                <a:solidFill>
+                  <a:schemeClr val="tx1"/>
+                </a:solidFill>
+                <a:effectLst/>
+                <a:latin typeface="+mn-lt"/>
+                <a:ea typeface="+mn-ea"/>
+                <a:cs typeface="+mn-cs"/>
+              </a:rPr>
+              <a:t> | Medium -- needs HTML/CSS | Python/web students |</a:t>
+            </a:r>
+          </a:p>
+          <a:p>
+            <a:r>
+              <a:rPr lang="en-IN" sz="1200" b="0" kern="1200" dirty="0">
+                <a:solidFill>
+                  <a:schemeClr val="tx1"/>
+                </a:solidFill>
+                <a:effectLst/>
+                <a:latin typeface="+mn-lt"/>
+                <a:ea typeface="+mn-ea"/>
+                <a:cs typeface="+mn-cs"/>
+              </a:rPr>
+              <a:t>| </a:t>
+            </a:r>
+            <a:r>
+              <a:rPr lang="en-IN" sz="1200" b="1" kern="1200" dirty="0">
+                <a:solidFill>
+                  <a:schemeClr val="tx1"/>
+                </a:solidFill>
+                <a:effectLst/>
+                <a:latin typeface="+mn-lt"/>
+                <a:ea typeface="+mn-ea"/>
+                <a:cs typeface="+mn-cs"/>
+              </a:rPr>
+              <a:t>**WordPress**</a:t>
+            </a:r>
+            <a:r>
+              <a:rPr lang="en-IN" sz="1200" b="0" kern="1200" dirty="0">
+                <a:solidFill>
+                  <a:schemeClr val="tx1"/>
+                </a:solidFill>
+                <a:effectLst/>
+                <a:latin typeface="+mn-lt"/>
+                <a:ea typeface="+mn-ea"/>
+                <a:cs typeface="+mn-cs"/>
+              </a:rPr>
+              <a:t> | Medium-High -- full site | DM students (SEO practice too) |</a:t>
+            </a:r>
+          </a:p>
+          <a:p>
+            <a:r>
+              <a:rPr lang="en-IN" sz="1200" b="0" kern="1200" dirty="0">
+                <a:solidFill>
+                  <a:schemeClr val="tx1"/>
+                </a:solidFill>
+                <a:effectLst/>
+                <a:latin typeface="+mn-lt"/>
+                <a:ea typeface="+mn-ea"/>
+                <a:cs typeface="+mn-cs"/>
+              </a:rPr>
+              <a:t>| </a:t>
+            </a:r>
+            <a:r>
+              <a:rPr lang="en-IN" sz="1200" b="1" kern="1200" dirty="0">
+                <a:solidFill>
+                  <a:schemeClr val="tx1"/>
+                </a:solidFill>
+                <a:effectLst/>
+                <a:latin typeface="+mn-lt"/>
+                <a:ea typeface="+mn-ea"/>
+                <a:cs typeface="+mn-cs"/>
+              </a:rPr>
+              <a:t>**</a:t>
+            </a:r>
+            <a:r>
+              <a:rPr lang="en-IN" sz="1200" b="1" kern="1200" dirty="0" err="1">
+                <a:solidFill>
+                  <a:schemeClr val="tx1"/>
+                </a:solidFill>
+                <a:effectLst/>
+                <a:latin typeface="+mn-lt"/>
+                <a:ea typeface="+mn-ea"/>
+                <a:cs typeface="+mn-cs"/>
+              </a:rPr>
+              <a:t>Bio.link</a:t>
+            </a:r>
+            <a:r>
+              <a:rPr lang="en-IN" sz="1200" b="1" kern="1200" dirty="0">
+                <a:solidFill>
+                  <a:schemeClr val="tx1"/>
+                </a:solidFill>
+                <a:effectLst/>
+                <a:latin typeface="+mn-lt"/>
+                <a:ea typeface="+mn-ea"/>
+                <a:cs typeface="+mn-cs"/>
+              </a:rPr>
+              <a:t> / </a:t>
+            </a:r>
+            <a:r>
+              <a:rPr lang="en-IN" sz="1200" b="1" kern="1200" dirty="0" err="1">
+                <a:solidFill>
+                  <a:schemeClr val="tx1"/>
+                </a:solidFill>
+                <a:effectLst/>
+                <a:latin typeface="+mn-lt"/>
+                <a:ea typeface="+mn-ea"/>
+                <a:cs typeface="+mn-cs"/>
+              </a:rPr>
+              <a:t>Linktree</a:t>
+            </a:r>
+            <a:r>
+              <a:rPr lang="en-IN" sz="1200" b="1" kern="1200" dirty="0">
+                <a:solidFill>
+                  <a:schemeClr val="tx1"/>
+                </a:solidFill>
+                <a:effectLst/>
+                <a:latin typeface="+mn-lt"/>
+                <a:ea typeface="+mn-ea"/>
+                <a:cs typeface="+mn-cs"/>
+              </a:rPr>
+              <a:t>**</a:t>
+            </a:r>
+            <a:r>
+              <a:rPr lang="en-IN" sz="1200" b="0" kern="1200" dirty="0">
+                <a:solidFill>
+                  <a:schemeClr val="tx1"/>
+                </a:solidFill>
+                <a:effectLst/>
+                <a:latin typeface="+mn-lt"/>
+                <a:ea typeface="+mn-ea"/>
+                <a:cs typeface="+mn-cs"/>
+              </a:rPr>
+              <a:t> | Very low | Quick link-in-bio page |</a:t>
+            </a:r>
+          </a:p>
+          <a:p>
+            <a:br>
+              <a:rPr lang="en-IN" sz="1200" b="0" kern="1200" dirty="0">
+                <a:solidFill>
+                  <a:schemeClr val="tx1"/>
+                </a:solidFill>
+                <a:effectLst/>
+                <a:latin typeface="+mn-lt"/>
+                <a:ea typeface="+mn-ea"/>
+                <a:cs typeface="+mn-cs"/>
+              </a:rPr>
+            </a:br>
+            <a:endParaRPr lang="en-IN" sz="1200" b="0" kern="1200" dirty="0">
+              <a:solidFill>
+                <a:schemeClr val="tx1"/>
+              </a:solidFill>
+              <a:effectLst/>
+              <a:latin typeface="+mn-lt"/>
+              <a:ea typeface="+mn-ea"/>
+              <a:cs typeface="+mn-cs"/>
+            </a:endParaRPr>
+          </a:p>
+          <a:p>
+            <a:r>
+              <a:rPr lang="en-IN" sz="1200" b="0" i="1" kern="1200" dirty="0">
+                <a:solidFill>
+                  <a:schemeClr val="tx1"/>
+                </a:solidFill>
+                <a:effectLst/>
+                <a:latin typeface="+mn-lt"/>
+                <a:ea typeface="+mn-ea"/>
+                <a:cs typeface="+mn-cs"/>
+              </a:rPr>
+              <a:t>*"A portfolio website is your next step after today. Pick one that matches your comfort level."*</a:t>
+            </a:r>
+            <a:endParaRPr lang="en-IN" sz="1200" b="0" kern="1200" dirty="0">
+              <a:solidFill>
+                <a:schemeClr val="tx1"/>
+              </a:solidFill>
+              <a:effectLst/>
+              <a:latin typeface="+mn-lt"/>
+              <a:ea typeface="+mn-ea"/>
+              <a:cs typeface="+mn-cs"/>
+            </a:endParaRPr>
+          </a:p>
+          <a:p>
+            <a:endParaRPr lang="en-IN" dirty="0"/>
+          </a:p>
+        </p:txBody>
+      </p:sp>
+      <p:sp>
+        <p:nvSpPr>
+          <p:cNvPr id="4" name="Slide Number Placeholder 3"/>
+          <p:cNvSpPr>
+            <a:spLocks noGrp="1"/>
+          </p:cNvSpPr>
+          <p:nvPr>
+            <p:ph type="sldNum" sz="quarter" idx="5"/>
+          </p:nvPr>
+        </p:nvSpPr>
+        <p:spPr/>
+        <p:txBody>
+          <a:bodyPr/>
+          <a:lstStyle/>
+          <a:p>
+            <a:fld id="{0F820492-BEBC-4334-926F-386A19F3356A}" type="slidenum">
+              <a:rPr lang="en-IN" smtClean="0"/>
+              <a:t>6</a:t>
+            </a:fld>
+            <a:endParaRPr lang="en-IN"/>
+          </a:p>
+        </p:txBody>
+      </p:sp>
+    </p:spTree>
+    <p:extLst>
+      <p:ext uri="{BB962C8B-B14F-4D97-AF65-F5344CB8AC3E}">
+        <p14:creationId xmlns:p14="http://schemas.microsoft.com/office/powerpoint/2010/main" val="2064343601"/>
+      </p:ext>
+    </p:extLst>
+  </p:cSld>
+  <p:clrMapOvr>
+    <a:masterClrMapping/>
+  </p:clrMapOvr>
+</p:notes>
+</file>
+
+<file path=ppt/notesSlides/notesSlide5.xml><?xml version="1.0" encoding="utf-8"?>
+<p:notes xmlns:a="http://schemas.openxmlformats.org/drawingml/2006/main" xmlns:r="http://schemas.openxmlformats.org/officeDocument/2006/relationships" xmlns:p="http://schemas.openxmlformats.org/presentationml/2006/main">
+  <p:cSld>
+    <p:spTree>
+      <p:nvGrpSpPr>
+        <p:cNvPr id="1" name=""/>
+        <p:cNvGrpSpPr/>
+        <p:nvPr/>
+      </p:nvGrpSpPr>
+      <p:grpSpPr>
+        <a:xfrm>
+          <a:off x="0" y="0"/>
+          <a:ext cx="0" cy="0"/>
+          <a:chOff x="0" y="0"/>
+          <a:chExt cx="0" cy="0"/>
+        </a:xfrm>
+      </p:grpSpPr>
+      <p:sp>
+        <p:nvSpPr>
+          <p:cNvPr id="2" name="Slide Image Placeholder 1"/>
+          <p:cNvSpPr>
+            <a:spLocks noGrp="1" noRot="1" noChangeAspect="1"/>
+          </p:cNvSpPr>
+          <p:nvPr>
+            <p:ph type="sldImg"/>
+          </p:nvPr>
+        </p:nvSpPr>
+        <p:spPr/>
+      </p:sp>
+      <p:sp>
+        <p:nvSpPr>
+          <p:cNvPr id="3" name="Notes Placeholder 2"/>
+          <p:cNvSpPr>
+            <a:spLocks noGrp="1"/>
+          </p:cNvSpPr>
+          <p:nvPr>
+            <p:ph type="body" idx="1"/>
+          </p:nvPr>
+        </p:nvSpPr>
+        <p:spPr/>
+        <p:txBody>
+          <a:bodyPr/>
+          <a:lstStyle/>
+          <a:p>
+            <a:r>
+              <a:rPr lang="en-US" sz="1200" b="1" kern="1200" dirty="0">
+                <a:solidFill>
+                  <a:schemeClr val="tx1"/>
+                </a:solidFill>
+                <a:effectLst/>
+                <a:latin typeface="+mn-lt"/>
+                <a:ea typeface="+mn-ea"/>
+                <a:cs typeface="+mn-cs"/>
+              </a:rPr>
+              <a:t>**For:**</a:t>
+            </a:r>
+            <a:r>
+              <a:rPr lang="en-US" sz="1200" b="0" kern="1200" dirty="0">
+                <a:solidFill>
+                  <a:schemeClr val="tx1"/>
+                </a:solidFill>
+                <a:effectLst/>
+                <a:latin typeface="+mn-lt"/>
+                <a:ea typeface="+mn-ea"/>
+                <a:cs typeface="+mn-cs"/>
+              </a:rPr>
+              <a:t> Graphics and Design students</a:t>
+            </a:r>
+          </a:p>
+          <a:p>
+            <a:br>
+              <a:rPr lang="en-US" sz="1200" b="0" kern="1200" dirty="0">
+                <a:solidFill>
+                  <a:schemeClr val="tx1"/>
+                </a:solidFill>
+                <a:effectLst/>
+                <a:latin typeface="+mn-lt"/>
+                <a:ea typeface="+mn-ea"/>
+                <a:cs typeface="+mn-cs"/>
+              </a:rPr>
+            </a:br>
+            <a:endParaRPr lang="en-US" sz="1200" b="0" kern="1200" dirty="0">
+              <a:solidFill>
+                <a:schemeClr val="tx1"/>
+              </a:solidFill>
+              <a:effectLst/>
+              <a:latin typeface="+mn-lt"/>
+              <a:ea typeface="+mn-ea"/>
+              <a:cs typeface="+mn-cs"/>
+            </a:endParaRPr>
+          </a:p>
+          <a:p>
+            <a:r>
+              <a:rPr lang="en-US" sz="1200" b="0" kern="1200" dirty="0">
+                <a:solidFill>
+                  <a:schemeClr val="tx1"/>
+                </a:solidFill>
+                <a:effectLst/>
+                <a:latin typeface="+mn-lt"/>
+                <a:ea typeface="+mn-ea"/>
+                <a:cs typeface="+mn-cs"/>
+              </a:rPr>
+              <a:t>- </a:t>
+            </a:r>
+            <a:r>
+              <a:rPr lang="en-US" sz="1200" b="0" kern="1200" dirty="0" err="1">
+                <a:solidFill>
+                  <a:schemeClr val="tx1"/>
+                </a:solidFill>
+                <a:effectLst/>
+                <a:latin typeface="+mn-lt"/>
+                <a:ea typeface="+mn-ea"/>
+                <a:cs typeface="+mn-cs"/>
+              </a:rPr>
+              <a:t>Behance</a:t>
+            </a:r>
+            <a:r>
+              <a:rPr lang="en-US" sz="1200" b="0" kern="1200" dirty="0">
+                <a:solidFill>
+                  <a:schemeClr val="tx1"/>
+                </a:solidFill>
+                <a:effectLst/>
+                <a:latin typeface="+mn-lt"/>
+                <a:ea typeface="+mn-ea"/>
+                <a:cs typeface="+mn-cs"/>
+              </a:rPr>
+              <a:t> = Adobe's platform, industry standard for designers</a:t>
+            </a:r>
+          </a:p>
+          <a:p>
+            <a:r>
+              <a:rPr lang="en-US" sz="1200" b="0" kern="1200" dirty="0">
+                <a:solidFill>
+                  <a:schemeClr val="tx1"/>
+                </a:solidFill>
+                <a:effectLst/>
+                <a:latin typeface="+mn-lt"/>
+                <a:ea typeface="+mn-ea"/>
+                <a:cs typeface="+mn-cs"/>
+              </a:rPr>
+              <a:t>- </a:t>
+            </a:r>
+            <a:r>
+              <a:rPr lang="en-US" sz="1200" b="0" kern="1200" dirty="0" err="1">
+                <a:solidFill>
+                  <a:schemeClr val="tx1"/>
+                </a:solidFill>
+                <a:effectLst/>
+                <a:latin typeface="+mn-lt"/>
+                <a:ea typeface="+mn-ea"/>
+                <a:cs typeface="+mn-cs"/>
+              </a:rPr>
+              <a:t>Dribbble</a:t>
+            </a:r>
+            <a:r>
+              <a:rPr lang="en-US" sz="1200" b="0" kern="1200" dirty="0">
+                <a:solidFill>
+                  <a:schemeClr val="tx1"/>
+                </a:solidFill>
+                <a:effectLst/>
+                <a:latin typeface="+mn-lt"/>
+                <a:ea typeface="+mn-ea"/>
+                <a:cs typeface="+mn-cs"/>
+              </a:rPr>
+              <a:t> = more curated, invite-based community</a:t>
+            </a:r>
+          </a:p>
+          <a:p>
+            <a:r>
+              <a:rPr lang="en-US" sz="1200" b="0" kern="1200" dirty="0">
+                <a:solidFill>
+                  <a:schemeClr val="tx1"/>
+                </a:solidFill>
+                <a:effectLst/>
+                <a:latin typeface="+mn-lt"/>
+                <a:ea typeface="+mn-ea"/>
+                <a:cs typeface="+mn-cs"/>
+              </a:rPr>
+              <a:t>- Upload poster designs, logos, social media graphics, brand work</a:t>
+            </a:r>
+          </a:p>
+          <a:p>
+            <a:r>
+              <a:rPr lang="en-US" sz="1200" b="0" kern="1200" dirty="0">
+                <a:solidFill>
+                  <a:schemeClr val="tx1"/>
+                </a:solidFill>
+                <a:effectLst/>
+                <a:latin typeface="+mn-lt"/>
+                <a:ea typeface="+mn-ea"/>
+                <a:cs typeface="+mn-cs"/>
+              </a:rPr>
+              <a:t>- Clients and agencies actively browse these to find designers</a:t>
+            </a:r>
+          </a:p>
+          <a:p>
+            <a:br>
+              <a:rPr lang="en-US" sz="1200" b="0" kern="1200" dirty="0">
+                <a:solidFill>
+                  <a:schemeClr val="tx1"/>
+                </a:solidFill>
+                <a:effectLst/>
+                <a:latin typeface="+mn-lt"/>
+                <a:ea typeface="+mn-ea"/>
+                <a:cs typeface="+mn-cs"/>
+              </a:rPr>
+            </a:br>
+            <a:endParaRPr lang="en-US" sz="1200" b="0" kern="1200" dirty="0">
+              <a:solidFill>
+                <a:schemeClr val="tx1"/>
+              </a:solidFill>
+              <a:effectLst/>
+              <a:latin typeface="+mn-lt"/>
+              <a:ea typeface="+mn-ea"/>
+              <a:cs typeface="+mn-cs"/>
+            </a:endParaRPr>
+          </a:p>
+          <a:p>
+            <a:r>
+              <a:rPr lang="en-US" sz="1200" b="0" i="1" kern="1200" dirty="0">
+                <a:solidFill>
+                  <a:schemeClr val="tx1"/>
+                </a:solidFill>
+                <a:effectLst/>
+                <a:latin typeface="+mn-lt"/>
+                <a:ea typeface="+mn-ea"/>
+                <a:cs typeface="+mn-cs"/>
+              </a:rPr>
+              <a:t>*"If you're in graphics, </a:t>
+            </a:r>
+            <a:r>
+              <a:rPr lang="en-US" sz="1200" b="0" i="1" kern="1200" dirty="0" err="1">
+                <a:solidFill>
+                  <a:schemeClr val="tx1"/>
+                </a:solidFill>
+                <a:effectLst/>
+                <a:latin typeface="+mn-lt"/>
+                <a:ea typeface="+mn-ea"/>
+                <a:cs typeface="+mn-cs"/>
+              </a:rPr>
+              <a:t>Behance</a:t>
+            </a:r>
+            <a:r>
+              <a:rPr lang="en-US" sz="1200" b="0" i="1" kern="1200" dirty="0">
+                <a:solidFill>
+                  <a:schemeClr val="tx1"/>
+                </a:solidFill>
+                <a:effectLst/>
+                <a:latin typeface="+mn-lt"/>
+                <a:ea typeface="+mn-ea"/>
+                <a:cs typeface="+mn-cs"/>
+              </a:rPr>
+              <a:t> is your GitHub. Start uploading your best work."*</a:t>
+            </a:r>
+            <a:endParaRPr lang="en-US" sz="1200" b="0" kern="1200" dirty="0">
+              <a:solidFill>
+                <a:schemeClr val="tx1"/>
+              </a:solidFill>
+              <a:effectLst/>
+              <a:latin typeface="+mn-lt"/>
+              <a:ea typeface="+mn-ea"/>
+              <a:cs typeface="+mn-cs"/>
+            </a:endParaRPr>
+          </a:p>
+          <a:p>
+            <a:br>
+              <a:rPr lang="en-US" sz="1200" b="0" kern="1200" dirty="0">
+                <a:solidFill>
+                  <a:schemeClr val="tx1"/>
+                </a:solidFill>
+                <a:effectLst/>
+                <a:latin typeface="+mn-lt"/>
+                <a:ea typeface="+mn-ea"/>
+                <a:cs typeface="+mn-cs"/>
+              </a:rPr>
+            </a:br>
+            <a:endParaRPr lang="en-US" sz="1200" b="0" kern="1200" dirty="0">
+              <a:solidFill>
+                <a:schemeClr val="tx1"/>
+              </a:solidFill>
+              <a:effectLst/>
+              <a:latin typeface="+mn-lt"/>
+              <a:ea typeface="+mn-ea"/>
+              <a:cs typeface="+mn-cs"/>
+            </a:endParaRPr>
+          </a:p>
+          <a:p>
+            <a:endParaRPr lang="en-IN" dirty="0"/>
+          </a:p>
+        </p:txBody>
+      </p:sp>
+      <p:sp>
+        <p:nvSpPr>
+          <p:cNvPr id="4" name="Slide Number Placeholder 3"/>
+          <p:cNvSpPr>
+            <a:spLocks noGrp="1"/>
+          </p:cNvSpPr>
+          <p:nvPr>
+            <p:ph type="sldNum" sz="quarter" idx="5"/>
+          </p:nvPr>
+        </p:nvSpPr>
+        <p:spPr/>
+        <p:txBody>
+          <a:bodyPr/>
+          <a:lstStyle/>
+          <a:p>
+            <a:fld id="{0F820492-BEBC-4334-926F-386A19F3356A}" type="slidenum">
+              <a:rPr lang="en-IN" smtClean="0"/>
+              <a:t>7</a:t>
+            </a:fld>
+            <a:endParaRPr lang="en-IN"/>
+          </a:p>
+        </p:txBody>
+      </p:sp>
+    </p:spTree>
+    <p:extLst>
+      <p:ext uri="{BB962C8B-B14F-4D97-AF65-F5344CB8AC3E}">
+        <p14:creationId xmlns:p14="http://schemas.microsoft.com/office/powerpoint/2010/main" val="1679103568"/>
+      </p:ext>
+    </p:extLst>
+  </p:cSld>
+  <p:clrMapOvr>
+    <a:masterClrMapping/>
+  </p:clrMapOvr>
+</p:notes>
+</file>
+
+<file path=ppt/notesSlides/notesSlide6.xml><?xml version="1.0" encoding="utf-8"?>
+<p:notes xmlns:a="http://schemas.openxmlformats.org/drawingml/2006/main" xmlns:r="http://schemas.openxmlformats.org/officeDocument/2006/relationships" xmlns:p="http://schemas.openxmlformats.org/presentationml/2006/main">
+  <p:cSld>
+    <p:spTree>
+      <p:nvGrpSpPr>
+        <p:cNvPr id="1" name=""/>
+        <p:cNvGrpSpPr/>
+        <p:nvPr/>
+      </p:nvGrpSpPr>
+      <p:grpSpPr>
+        <a:xfrm>
+          <a:off x="0" y="0"/>
+          <a:ext cx="0" cy="0"/>
+          <a:chOff x="0" y="0"/>
+          <a:chExt cx="0" cy="0"/>
+        </a:xfrm>
+      </p:grpSpPr>
+      <p:sp>
+        <p:nvSpPr>
+          <p:cNvPr id="2" name="Slide Image Placeholder 1"/>
+          <p:cNvSpPr>
+            <a:spLocks noGrp="1" noRot="1" noChangeAspect="1"/>
+          </p:cNvSpPr>
+          <p:nvPr>
+            <p:ph type="sldImg"/>
+          </p:nvPr>
+        </p:nvSpPr>
+        <p:spPr/>
+      </p:sp>
+      <p:sp>
+        <p:nvSpPr>
+          <p:cNvPr id="3" name="Notes Placeholder 2"/>
+          <p:cNvSpPr>
+            <a:spLocks noGrp="1"/>
+          </p:cNvSpPr>
+          <p:nvPr>
+            <p:ph type="body" idx="1"/>
+          </p:nvPr>
+        </p:nvSpPr>
+        <p:spPr/>
+        <p:txBody>
+          <a:bodyPr/>
+          <a:lstStyle/>
+          <a:p>
+            <a:r>
+              <a:rPr lang="en-US" sz="1200" b="0" kern="1200" dirty="0">
+                <a:solidFill>
+                  <a:schemeClr val="tx1"/>
+                </a:solidFill>
+                <a:effectLst/>
+                <a:latin typeface="+mn-lt"/>
+                <a:ea typeface="+mn-ea"/>
+                <a:cs typeface="+mn-cs"/>
+              </a:rPr>
+              <a:t>| What | Why It Helps |</a:t>
+            </a:r>
+          </a:p>
+          <a:p>
+            <a:r>
+              <a:rPr lang="en-US" sz="1200" b="0" kern="1200" dirty="0">
+                <a:solidFill>
+                  <a:schemeClr val="tx1"/>
+                </a:solidFill>
+                <a:effectLst/>
+                <a:latin typeface="+mn-lt"/>
+                <a:ea typeface="+mn-ea"/>
+                <a:cs typeface="+mn-cs"/>
+              </a:rPr>
+              <a:t>|------|-------------|</a:t>
+            </a:r>
+          </a:p>
+          <a:p>
+            <a:r>
+              <a:rPr lang="en-US" sz="1200" b="0" kern="1200" dirty="0">
+                <a:solidFill>
+                  <a:schemeClr val="tx1"/>
+                </a:solidFill>
+                <a:effectLst/>
+                <a:latin typeface="+mn-lt"/>
+                <a:ea typeface="+mn-ea"/>
+                <a:cs typeface="+mn-cs"/>
+              </a:rPr>
+              <a:t>| </a:t>
+            </a:r>
+            <a:r>
+              <a:rPr lang="en-US" sz="1200" b="1" kern="1200" dirty="0">
+                <a:solidFill>
+                  <a:schemeClr val="tx1"/>
+                </a:solidFill>
+                <a:effectLst/>
+                <a:latin typeface="+mn-lt"/>
+                <a:ea typeface="+mn-ea"/>
+                <a:cs typeface="+mn-cs"/>
+              </a:rPr>
+              <a:t>**Write LinkedIn posts**</a:t>
+            </a:r>
+            <a:r>
+              <a:rPr lang="en-US" sz="1200" b="0" kern="1200" dirty="0">
+                <a:solidFill>
+                  <a:schemeClr val="tx1"/>
+                </a:solidFill>
+                <a:effectLst/>
+                <a:latin typeface="+mn-lt"/>
+                <a:ea typeface="+mn-ea"/>
+                <a:cs typeface="+mn-cs"/>
+              </a:rPr>
+              <a:t> | Shows you're active, builds visibility, algorithm rewards consistency |</a:t>
+            </a:r>
+          </a:p>
+          <a:p>
+            <a:r>
+              <a:rPr lang="en-US" sz="1200" b="0" kern="1200" dirty="0">
+                <a:solidFill>
+                  <a:schemeClr val="tx1"/>
+                </a:solidFill>
+                <a:effectLst/>
+                <a:latin typeface="+mn-lt"/>
+                <a:ea typeface="+mn-ea"/>
+                <a:cs typeface="+mn-cs"/>
+              </a:rPr>
+              <a:t>| </a:t>
+            </a:r>
+            <a:r>
+              <a:rPr lang="en-US" sz="1200" b="1" kern="1200" dirty="0">
+                <a:solidFill>
+                  <a:schemeClr val="tx1"/>
+                </a:solidFill>
+                <a:effectLst/>
+                <a:latin typeface="+mn-lt"/>
+                <a:ea typeface="+mn-ea"/>
+                <a:cs typeface="+mn-cs"/>
+              </a:rPr>
+              <a:t>**Get recommendations on LinkedIn**</a:t>
+            </a:r>
+            <a:r>
+              <a:rPr lang="en-US" sz="1200" b="0" kern="1200" dirty="0">
+                <a:solidFill>
+                  <a:schemeClr val="tx1"/>
+                </a:solidFill>
+                <a:effectLst/>
+                <a:latin typeface="+mn-lt"/>
+                <a:ea typeface="+mn-ea"/>
+                <a:cs typeface="+mn-cs"/>
+              </a:rPr>
+              <a:t> | Social proof from trainers, peers, clients |</a:t>
+            </a:r>
+          </a:p>
+          <a:p>
+            <a:r>
+              <a:rPr lang="en-US" sz="1200" b="0" kern="1200" dirty="0">
+                <a:solidFill>
+                  <a:schemeClr val="tx1"/>
+                </a:solidFill>
+                <a:effectLst/>
+                <a:latin typeface="+mn-lt"/>
+                <a:ea typeface="+mn-ea"/>
+                <a:cs typeface="+mn-cs"/>
+              </a:rPr>
+              <a:t>| </a:t>
+            </a:r>
+            <a:r>
+              <a:rPr lang="en-US" sz="1200" b="1" kern="1200" dirty="0">
+                <a:solidFill>
+                  <a:schemeClr val="tx1"/>
+                </a:solidFill>
+                <a:effectLst/>
+                <a:latin typeface="+mn-lt"/>
+                <a:ea typeface="+mn-ea"/>
+                <a:cs typeface="+mn-cs"/>
+              </a:rPr>
+              <a:t>**Contribute to open source**</a:t>
+            </a:r>
+            <a:r>
+              <a:rPr lang="en-US" sz="1200" b="0" kern="1200" dirty="0">
+                <a:solidFill>
+                  <a:schemeClr val="tx1"/>
+                </a:solidFill>
+                <a:effectLst/>
+                <a:latin typeface="+mn-lt"/>
+                <a:ea typeface="+mn-ea"/>
+                <a:cs typeface="+mn-cs"/>
+              </a:rPr>
+              <a:t> | Shows initiative (for coders) |</a:t>
+            </a:r>
+          </a:p>
+          <a:p>
+            <a:r>
+              <a:rPr lang="en-US" sz="1200" b="0" kern="1200" dirty="0">
+                <a:solidFill>
+                  <a:schemeClr val="tx1"/>
+                </a:solidFill>
+                <a:effectLst/>
+                <a:latin typeface="+mn-lt"/>
+                <a:ea typeface="+mn-ea"/>
+                <a:cs typeface="+mn-cs"/>
+              </a:rPr>
+              <a:t>| </a:t>
+            </a:r>
+            <a:r>
+              <a:rPr lang="en-US" sz="1200" b="1" kern="1200" dirty="0">
+                <a:solidFill>
+                  <a:schemeClr val="tx1"/>
+                </a:solidFill>
+                <a:effectLst/>
+                <a:latin typeface="+mn-lt"/>
+                <a:ea typeface="+mn-ea"/>
+                <a:cs typeface="+mn-cs"/>
+              </a:rPr>
+              <a:t>**Start a blog**</a:t>
+            </a:r>
+            <a:r>
+              <a:rPr lang="en-US" sz="1200" b="0" kern="1200" dirty="0">
+                <a:solidFill>
+                  <a:schemeClr val="tx1"/>
+                </a:solidFill>
+                <a:effectLst/>
+                <a:latin typeface="+mn-lt"/>
+                <a:ea typeface="+mn-ea"/>
+                <a:cs typeface="+mn-cs"/>
+              </a:rPr>
+              <a:t> | </a:t>
+            </a:r>
+            <a:r>
+              <a:rPr lang="en-US" sz="1200" b="0" kern="1200" dirty="0" err="1">
+                <a:solidFill>
+                  <a:schemeClr val="tx1"/>
+                </a:solidFill>
+                <a:effectLst/>
+                <a:latin typeface="+mn-lt"/>
+                <a:ea typeface="+mn-ea"/>
+                <a:cs typeface="+mn-cs"/>
+              </a:rPr>
+              <a:t>Hashnode</a:t>
+            </a:r>
+            <a:r>
+              <a:rPr lang="en-US" sz="1200" b="0" kern="1200" dirty="0">
+                <a:solidFill>
+                  <a:schemeClr val="tx1"/>
+                </a:solidFill>
+                <a:effectLst/>
+                <a:latin typeface="+mn-lt"/>
+                <a:ea typeface="+mn-ea"/>
+                <a:cs typeface="+mn-cs"/>
+              </a:rPr>
+              <a:t>, Medium, or your own site -- shows thought leadership |</a:t>
+            </a:r>
+          </a:p>
+          <a:p>
+            <a:r>
+              <a:rPr lang="en-US" sz="1200" b="0" kern="1200" dirty="0">
+                <a:solidFill>
+                  <a:schemeClr val="tx1"/>
+                </a:solidFill>
+                <a:effectLst/>
+                <a:latin typeface="+mn-lt"/>
+                <a:ea typeface="+mn-ea"/>
+                <a:cs typeface="+mn-cs"/>
+              </a:rPr>
+              <a:t>| </a:t>
+            </a:r>
+            <a:r>
+              <a:rPr lang="en-US" sz="1200" b="1" kern="1200" dirty="0">
+                <a:solidFill>
+                  <a:schemeClr val="tx1"/>
+                </a:solidFill>
+                <a:effectLst/>
+                <a:latin typeface="+mn-lt"/>
+                <a:ea typeface="+mn-ea"/>
+                <a:cs typeface="+mn-cs"/>
+              </a:rPr>
+              <a:t>**Build in public**</a:t>
+            </a:r>
+            <a:r>
+              <a:rPr lang="en-US" sz="1200" b="0" kern="1200" dirty="0">
+                <a:solidFill>
+                  <a:schemeClr val="tx1"/>
+                </a:solidFill>
+                <a:effectLst/>
+                <a:latin typeface="+mn-lt"/>
+                <a:ea typeface="+mn-ea"/>
+                <a:cs typeface="+mn-cs"/>
+              </a:rPr>
+              <a:t> | Share your learning journey -- people connect with progress |</a:t>
+            </a:r>
+          </a:p>
+          <a:p>
+            <a:r>
+              <a:rPr lang="en-US" sz="1200" b="0" kern="1200" dirty="0">
+                <a:solidFill>
+                  <a:schemeClr val="tx1"/>
+                </a:solidFill>
+                <a:effectLst/>
+                <a:latin typeface="+mn-lt"/>
+                <a:ea typeface="+mn-ea"/>
+                <a:cs typeface="+mn-cs"/>
+              </a:rPr>
+              <a:t>| </a:t>
+            </a:r>
+            <a:r>
+              <a:rPr lang="en-US" sz="1200" b="1" kern="1200" dirty="0">
+                <a:solidFill>
+                  <a:schemeClr val="tx1"/>
+                </a:solidFill>
+                <a:effectLst/>
+                <a:latin typeface="+mn-lt"/>
+                <a:ea typeface="+mn-ea"/>
+                <a:cs typeface="+mn-cs"/>
+              </a:rPr>
+              <a:t>**Collect testimonials**</a:t>
+            </a:r>
+            <a:r>
+              <a:rPr lang="en-US" sz="1200" b="0" kern="1200" dirty="0">
+                <a:solidFill>
+                  <a:schemeClr val="tx1"/>
+                </a:solidFill>
+                <a:effectLst/>
+                <a:latin typeface="+mn-lt"/>
+                <a:ea typeface="+mn-ea"/>
+                <a:cs typeface="+mn-cs"/>
+              </a:rPr>
+              <a:t> | From project collaborators, clients, mentors |</a:t>
+            </a:r>
+          </a:p>
+          <a:p>
+            <a:r>
+              <a:rPr lang="en-US" sz="1200" b="0" kern="1200" dirty="0">
+                <a:solidFill>
+                  <a:schemeClr val="tx1"/>
+                </a:solidFill>
+                <a:effectLst/>
+                <a:latin typeface="+mn-lt"/>
+                <a:ea typeface="+mn-ea"/>
+                <a:cs typeface="+mn-cs"/>
+              </a:rPr>
+              <a:t>| </a:t>
+            </a:r>
+            <a:r>
+              <a:rPr lang="en-US" sz="1200" b="1" kern="1200" dirty="0">
+                <a:solidFill>
+                  <a:schemeClr val="tx1"/>
+                </a:solidFill>
+                <a:effectLst/>
+                <a:latin typeface="+mn-lt"/>
+                <a:ea typeface="+mn-ea"/>
+                <a:cs typeface="+mn-cs"/>
+              </a:rPr>
+              <a:t>**Google yourself**</a:t>
+            </a:r>
+            <a:r>
+              <a:rPr lang="en-US" sz="1200" b="0" kern="1200" dirty="0">
+                <a:solidFill>
+                  <a:schemeClr val="tx1"/>
+                </a:solidFill>
+                <a:effectLst/>
+                <a:latin typeface="+mn-lt"/>
+                <a:ea typeface="+mn-ea"/>
+                <a:cs typeface="+mn-cs"/>
+              </a:rPr>
+              <a:t> | Check what comes up -- then fix it |</a:t>
+            </a:r>
+          </a:p>
+          <a:p>
+            <a:br>
+              <a:rPr lang="en-US" sz="1200" b="0" kern="1200" dirty="0">
+                <a:solidFill>
+                  <a:schemeClr val="tx1"/>
+                </a:solidFill>
+                <a:effectLst/>
+                <a:latin typeface="+mn-lt"/>
+                <a:ea typeface="+mn-ea"/>
+                <a:cs typeface="+mn-cs"/>
+              </a:rPr>
+            </a:br>
+            <a:endParaRPr lang="en-US" sz="1200" b="0" kern="1200" dirty="0">
+              <a:solidFill>
+                <a:schemeClr val="tx1"/>
+              </a:solidFill>
+              <a:effectLst/>
+              <a:latin typeface="+mn-lt"/>
+              <a:ea typeface="+mn-ea"/>
+              <a:cs typeface="+mn-cs"/>
+            </a:endParaRPr>
+          </a:p>
+          <a:p>
+            <a:r>
+              <a:rPr lang="en-US" sz="1200" b="0" i="1" kern="1200" dirty="0">
+                <a:solidFill>
+                  <a:schemeClr val="tx1"/>
+                </a:solidFill>
+                <a:effectLst/>
+                <a:latin typeface="+mn-lt"/>
+                <a:ea typeface="+mn-ea"/>
+                <a:cs typeface="+mn-cs"/>
+              </a:rPr>
+              <a:t>*"Your digital profile isn't a one-time thing. It's something you keep building. Today we lay the foundation."*</a:t>
+            </a:r>
+            <a:endParaRPr lang="en-US" sz="1200" b="0" kern="1200" dirty="0">
+              <a:solidFill>
+                <a:schemeClr val="tx1"/>
+              </a:solidFill>
+              <a:effectLst/>
+              <a:latin typeface="+mn-lt"/>
+              <a:ea typeface="+mn-ea"/>
+              <a:cs typeface="+mn-cs"/>
+            </a:endParaRPr>
+          </a:p>
+          <a:p>
+            <a:endParaRPr lang="en-IN" dirty="0"/>
+          </a:p>
+        </p:txBody>
+      </p:sp>
+      <p:sp>
+        <p:nvSpPr>
+          <p:cNvPr id="4" name="Slide Number Placeholder 3"/>
+          <p:cNvSpPr>
+            <a:spLocks noGrp="1"/>
+          </p:cNvSpPr>
+          <p:nvPr>
+            <p:ph type="sldNum" sz="quarter" idx="5"/>
+          </p:nvPr>
+        </p:nvSpPr>
+        <p:spPr/>
+        <p:txBody>
+          <a:bodyPr/>
+          <a:lstStyle/>
+          <a:p>
+            <a:fld id="{0F820492-BEBC-4334-926F-386A19F3356A}" type="slidenum">
+              <a:rPr lang="en-IN" smtClean="0"/>
+              <a:t>8</a:t>
+            </a:fld>
+            <a:endParaRPr lang="en-IN"/>
+          </a:p>
+        </p:txBody>
+      </p:sp>
+    </p:spTree>
+    <p:extLst>
+      <p:ext uri="{BB962C8B-B14F-4D97-AF65-F5344CB8AC3E}">
+        <p14:creationId xmlns:p14="http://schemas.microsoft.com/office/powerpoint/2010/main" val="3857846711"/>
+      </p:ext>
+    </p:extLst>
+  </p:cSld>
+  <p:clrMapOvr>
+    <a:masterClrMapping/>
+  </p:clrMapOvr>
+</p:notes>
+</file>
+
+<file path=ppt/notesSlides/notesSlide7.xml><?xml version="1.0" encoding="utf-8"?>
+<p:notes xmlns:a="http://schemas.openxmlformats.org/drawingml/2006/main" xmlns:r="http://schemas.openxmlformats.org/officeDocument/2006/relationships" xmlns:p="http://schemas.openxmlformats.org/presentationml/2006/main">
+  <p:cSld>
+    <p:spTree>
+      <p:nvGrpSpPr>
+        <p:cNvPr id="1" name=""/>
+        <p:cNvGrpSpPr/>
+        <p:nvPr/>
+      </p:nvGrpSpPr>
+      <p:grpSpPr>
+        <a:xfrm>
+          <a:off x="0" y="0"/>
+          <a:ext cx="0" cy="0"/>
+          <a:chOff x="0" y="0"/>
+          <a:chExt cx="0" cy="0"/>
+        </a:xfrm>
+      </p:grpSpPr>
+      <p:sp>
+        <p:nvSpPr>
+          <p:cNvPr id="2" name="Slide Image Placeholder 1"/>
+          <p:cNvSpPr>
+            <a:spLocks noGrp="1" noRot="1" noChangeAspect="1"/>
+          </p:cNvSpPr>
+          <p:nvPr>
+            <p:ph type="sldImg"/>
+          </p:nvPr>
+        </p:nvSpPr>
+        <p:spPr/>
+      </p:sp>
+      <p:sp>
+        <p:nvSpPr>
+          <p:cNvPr id="3" name="Notes Placeholder 2"/>
+          <p:cNvSpPr>
+            <a:spLocks noGrp="1"/>
+          </p:cNvSpPr>
+          <p:nvPr>
+            <p:ph type="body" idx="1"/>
+          </p:nvPr>
+        </p:nvSpPr>
+        <p:spPr/>
+        <p:txBody>
+          <a:bodyPr/>
+          <a:lstStyle/>
+          <a:p>
+            <a:br>
+              <a:rPr lang="en-US" sz="1200" b="0" kern="1200" dirty="0">
+                <a:solidFill>
+                  <a:schemeClr val="tx1"/>
+                </a:solidFill>
+                <a:effectLst/>
+                <a:latin typeface="+mn-lt"/>
+                <a:ea typeface="+mn-ea"/>
+                <a:cs typeface="+mn-cs"/>
+              </a:rPr>
+            </a:br>
+            <a:endParaRPr lang="en-US" sz="1200" b="0" kern="1200" dirty="0">
+              <a:solidFill>
+                <a:schemeClr val="tx1"/>
+              </a:solidFill>
+              <a:effectLst/>
+              <a:latin typeface="+mn-lt"/>
+              <a:ea typeface="+mn-ea"/>
+              <a:cs typeface="+mn-cs"/>
+            </a:endParaRPr>
+          </a:p>
+          <a:p>
+            <a:r>
+              <a:rPr lang="en-US" sz="1200" b="0" i="1" kern="1200" dirty="0">
+                <a:solidFill>
+                  <a:schemeClr val="tx1"/>
+                </a:solidFill>
+                <a:effectLst/>
+                <a:latin typeface="+mn-lt"/>
+                <a:ea typeface="+mn-ea"/>
+                <a:cs typeface="+mn-cs"/>
+              </a:rPr>
+              <a:t>*"Everything we're building today -- LinkedIn, resume, the platforms we discussed -- becomes incredibly powerful when you start applying for jobs, internships, or freelance work. A strong digital profile is the first filter. We'll do a dedicated career and job-readiness session later. Today is about making yourself visible."*</a:t>
+            </a:r>
+            <a:endParaRPr lang="en-US" sz="1200" b="0" kern="1200" dirty="0">
+              <a:solidFill>
+                <a:schemeClr val="tx1"/>
+              </a:solidFill>
+              <a:effectLst/>
+              <a:latin typeface="+mn-lt"/>
+              <a:ea typeface="+mn-ea"/>
+              <a:cs typeface="+mn-cs"/>
+            </a:endParaRPr>
+          </a:p>
+          <a:p>
+            <a:endParaRPr lang="en-IN" dirty="0"/>
+          </a:p>
+        </p:txBody>
+      </p:sp>
+      <p:sp>
+        <p:nvSpPr>
+          <p:cNvPr id="4" name="Slide Number Placeholder 3"/>
+          <p:cNvSpPr>
+            <a:spLocks noGrp="1"/>
+          </p:cNvSpPr>
+          <p:nvPr>
+            <p:ph type="sldNum" sz="quarter" idx="5"/>
+          </p:nvPr>
+        </p:nvSpPr>
+        <p:spPr/>
+        <p:txBody>
+          <a:bodyPr/>
+          <a:lstStyle/>
+          <a:p>
+            <a:fld id="{0F820492-BEBC-4334-926F-386A19F3356A}" type="slidenum">
+              <a:rPr lang="en-IN" smtClean="0"/>
+              <a:t>9</a:t>
+            </a:fld>
+            <a:endParaRPr lang="en-IN"/>
+          </a:p>
+        </p:txBody>
+      </p:sp>
+    </p:spTree>
+    <p:extLst>
+      <p:ext uri="{BB962C8B-B14F-4D97-AF65-F5344CB8AC3E}">
+        <p14:creationId xmlns:p14="http://schemas.microsoft.com/office/powerpoint/2010/main" val="3402255448"/>
+      </p:ext>
+    </p:extLst>
+  </p:cSld>
+  <p:clrMapOvr>
+    <a:masterClrMapping/>
+  </p:clrMapOvr>
+</p:notes>
 </file>
 
 <file path=ppt/slideLayouts/slideLayout1.xml><?xml version="1.0" encoding="utf-8"?>
@@ -164,10 +2771,9 @@
           <a:lstStyle/>
           <a:p>
             <a:r>
-              <a:rPr lang="en-US" smtClean="0"/>
+              <a:rPr lang="en-US"/>
               <a:t>Click to edit Master title style</a:t>
             </a:r>
-            <a:endParaRPr lang="en-US"/>
           </a:p>
         </p:txBody>
       </p:sp>
@@ -283,10 +2889,9 @@
           </a:lstStyle>
           <a:p>
             <a:r>
-              <a:rPr lang="en-US" smtClean="0"/>
+              <a:rPr lang="en-US"/>
               <a:t>Click to edit Master subtitle style</a:t>
             </a:r>
-            <a:endParaRPr lang="en-US"/>
           </a:p>
         </p:txBody>
       </p:sp>
@@ -307,7 +2912,7 @@
           <a:p>
             <a:fld id="{5BCAD085-E8A6-8845-BD4E-CB4CCA059FC4}" type="datetimeFigureOut">
               <a:rPr lang="en-US" smtClean="0"/>
-              <a:t>1/27/13</a:t>
+              <a:t>4/29/2026</a:t>
             </a:fld>
             <a:endParaRPr lang="en-US"/>
           </a:p>
@@ -401,10 +3006,9 @@
           <a:lstStyle/>
           <a:p>
             <a:r>
-              <a:rPr lang="en-US" smtClean="0"/>
+              <a:rPr lang="en-US"/>
               <a:t>Click to edit Master title style</a:t>
             </a:r>
-            <a:endParaRPr lang="en-US"/>
           </a:p>
         </p:txBody>
       </p:sp>
@@ -425,38 +3029,37 @@
           <a:p>
             <a:pPr lvl="0"/>
             <a:r>
-              <a:rPr lang="en-US" smtClean="0"/>
+              <a:rPr lang="en-US"/>
               <a:t>Click to edit Master text styles</a:t>
             </a:r>
           </a:p>
           <a:p>
             <a:pPr lvl="1"/>
             <a:r>
-              <a:rPr lang="en-US" smtClean="0"/>
+              <a:rPr lang="en-US"/>
               <a:t>Second level</a:t>
             </a:r>
           </a:p>
           <a:p>
             <a:pPr lvl="2"/>
             <a:r>
-              <a:rPr lang="en-US" smtClean="0"/>
+              <a:rPr lang="en-US"/>
               <a:t>Third level</a:t>
             </a:r>
           </a:p>
           <a:p>
             <a:pPr lvl="3"/>
             <a:r>
-              <a:rPr lang="en-US" smtClean="0"/>
+              <a:rPr lang="en-US"/>
               <a:t>Fourth level</a:t>
             </a:r>
           </a:p>
           <a:p>
             <a:pPr lvl="4"/>
             <a:r>
-              <a:rPr lang="en-US" smtClean="0"/>
+              <a:rPr lang="en-US"/>
               <a:t>Fifth level</a:t>
             </a:r>
-            <a:endParaRPr lang="en-US"/>
           </a:p>
         </p:txBody>
       </p:sp>
@@ -477,7 +3080,7 @@
           <a:p>
             <a:fld id="{5BCAD085-E8A6-8845-BD4E-CB4CCA059FC4}" type="datetimeFigureOut">
               <a:rPr lang="en-US" smtClean="0"/>
-              <a:t>1/27/13</a:t>
+              <a:t>4/29/2026</a:t>
             </a:fld>
             <a:endParaRPr lang="en-US"/>
           </a:p>
@@ -576,10 +3179,9 @@
           <a:lstStyle/>
           <a:p>
             <a:r>
-              <a:rPr lang="en-US" smtClean="0"/>
+              <a:rPr lang="en-US"/>
               <a:t>Click to edit Master title style</a:t>
             </a:r>
-            <a:endParaRPr lang="en-US"/>
           </a:p>
         </p:txBody>
       </p:sp>
@@ -605,38 +3207,37 @@
           <a:p>
             <a:pPr lvl="0"/>
             <a:r>
-              <a:rPr lang="en-US" smtClean="0"/>
+              <a:rPr lang="en-US"/>
               <a:t>Click to edit Master text styles</a:t>
             </a:r>
           </a:p>
           <a:p>
             <a:pPr lvl="1"/>
             <a:r>
-              <a:rPr lang="en-US" smtClean="0"/>
+              <a:rPr lang="en-US"/>
               <a:t>Second level</a:t>
             </a:r>
           </a:p>
           <a:p>
             <a:pPr lvl="2"/>
             <a:r>
-              <a:rPr lang="en-US" smtClean="0"/>
+              <a:rPr lang="en-US"/>
               <a:t>Third level</a:t>
             </a:r>
           </a:p>
           <a:p>
             <a:pPr lvl="3"/>
             <a:r>
-              <a:rPr lang="en-US" smtClean="0"/>
+              <a:rPr lang="en-US"/>
               <a:t>Fourth level</a:t>
             </a:r>
           </a:p>
           <a:p>
             <a:pPr lvl="4"/>
             <a:r>
-              <a:rPr lang="en-US" smtClean="0"/>
+              <a:rPr lang="en-US"/>
               <a:t>Fifth level</a:t>
             </a:r>
-            <a:endParaRPr lang="en-US"/>
           </a:p>
         </p:txBody>
       </p:sp>
@@ -657,7 +3258,7 @@
           <a:p>
             <a:fld id="{5BCAD085-E8A6-8845-BD4E-CB4CCA059FC4}" type="datetimeFigureOut">
               <a:rPr lang="en-US" smtClean="0"/>
-              <a:t>1/27/13</a:t>
+              <a:t>4/29/2026</a:t>
             </a:fld>
             <a:endParaRPr lang="en-US"/>
           </a:p>
@@ -751,10 +3352,9 @@
           <a:lstStyle/>
           <a:p>
             <a:r>
-              <a:rPr lang="en-US" smtClean="0"/>
+              <a:rPr lang="en-US"/>
               <a:t>Click to edit Master title style</a:t>
             </a:r>
-            <a:endParaRPr lang="en-US"/>
           </a:p>
         </p:txBody>
       </p:sp>
@@ -775,38 +3375,37 @@
           <a:p>
             <a:pPr lvl="0"/>
             <a:r>
-              <a:rPr lang="en-US" smtClean="0"/>
+              <a:rPr lang="en-US"/>
               <a:t>Click to edit Master text styles</a:t>
             </a:r>
           </a:p>
           <a:p>
             <a:pPr lvl="1"/>
             <a:r>
-              <a:rPr lang="en-US" smtClean="0"/>
+              <a:rPr lang="en-US"/>
               <a:t>Second level</a:t>
             </a:r>
           </a:p>
           <a:p>
             <a:pPr lvl="2"/>
             <a:r>
-              <a:rPr lang="en-US" smtClean="0"/>
+              <a:rPr lang="en-US"/>
               <a:t>Third level</a:t>
             </a:r>
           </a:p>
           <a:p>
             <a:pPr lvl="3"/>
             <a:r>
-              <a:rPr lang="en-US" smtClean="0"/>
+              <a:rPr lang="en-US"/>
               <a:t>Fourth level</a:t>
             </a:r>
           </a:p>
           <a:p>
             <a:pPr lvl="4"/>
             <a:r>
-              <a:rPr lang="en-US" smtClean="0"/>
+              <a:rPr lang="en-US"/>
               <a:t>Fifth level</a:t>
             </a:r>
-            <a:endParaRPr lang="en-US"/>
           </a:p>
         </p:txBody>
       </p:sp>
@@ -827,7 +3426,7 @@
           <a:p>
             <a:fld id="{5BCAD085-E8A6-8845-BD4E-CB4CCA059FC4}" type="datetimeFigureOut">
               <a:rPr lang="en-US" smtClean="0"/>
-              <a:t>1/27/13</a:t>
+              <a:t>4/29/2026</a:t>
             </a:fld>
             <a:endParaRPr lang="en-US"/>
           </a:p>
@@ -930,10 +3529,9 @@
           </a:lstStyle>
           <a:p>
             <a:r>
-              <a:rPr lang="en-US" smtClean="0"/>
+              <a:rPr lang="en-US"/>
               <a:t>Click to edit Master title style</a:t>
             </a:r>
-            <a:endParaRPr lang="en-US"/>
           </a:p>
         </p:txBody>
       </p:sp>
@@ -1050,7 +3648,7 @@
           <a:p>
             <a:pPr lvl="0"/>
             <a:r>
-              <a:rPr lang="en-US" smtClean="0"/>
+              <a:rPr lang="en-US"/>
               <a:t>Click to edit Master text styles</a:t>
             </a:r>
           </a:p>
@@ -1073,7 +3671,7 @@
           <a:p>
             <a:fld id="{5BCAD085-E8A6-8845-BD4E-CB4CCA059FC4}" type="datetimeFigureOut">
               <a:rPr lang="en-US" smtClean="0"/>
-              <a:t>1/27/13</a:t>
+              <a:t>4/29/2026</a:t>
             </a:fld>
             <a:endParaRPr lang="en-US"/>
           </a:p>
@@ -1167,10 +3765,9 @@
           <a:lstStyle/>
           <a:p>
             <a:r>
-              <a:rPr lang="en-US" smtClean="0"/>
+              <a:rPr lang="en-US"/>
               <a:t>Click to edit Master title style</a:t>
             </a:r>
-            <a:endParaRPr lang="en-US"/>
           </a:p>
         </p:txBody>
       </p:sp>
@@ -1224,38 +3821,37 @@
           <a:p>
             <a:pPr lvl="0"/>
             <a:r>
-              <a:rPr lang="en-US" smtClean="0"/>
+              <a:rPr lang="en-US"/>
               <a:t>Click to edit Master text styles</a:t>
             </a:r>
           </a:p>
           <a:p>
             <a:pPr lvl="1"/>
             <a:r>
-              <a:rPr lang="en-US" smtClean="0"/>
+              <a:rPr lang="en-US"/>
               <a:t>Second level</a:t>
             </a:r>
           </a:p>
           <a:p>
             <a:pPr lvl="2"/>
             <a:r>
-              <a:rPr lang="en-US" smtClean="0"/>
+              <a:rPr lang="en-US"/>
               <a:t>Third level</a:t>
             </a:r>
           </a:p>
           <a:p>
             <a:pPr lvl="3"/>
             <a:r>
-              <a:rPr lang="en-US" smtClean="0"/>
+              <a:rPr lang="en-US"/>
               <a:t>Fourth level</a:t>
             </a:r>
           </a:p>
           <a:p>
             <a:pPr lvl="4"/>
             <a:r>
-              <a:rPr lang="en-US" smtClean="0"/>
+              <a:rPr lang="en-US"/>
               <a:t>Fifth level</a:t>
             </a:r>
-            <a:endParaRPr lang="en-US"/>
           </a:p>
         </p:txBody>
       </p:sp>
@@ -1309,38 +3905,37 @@
           <a:p>
             <a:pPr lvl="0"/>
             <a:r>
-              <a:rPr lang="en-US" smtClean="0"/>
+              <a:rPr lang="en-US"/>
               <a:t>Click to edit Master text styles</a:t>
             </a:r>
           </a:p>
           <a:p>
             <a:pPr lvl="1"/>
             <a:r>
-              <a:rPr lang="en-US" smtClean="0"/>
+              <a:rPr lang="en-US"/>
               <a:t>Second level</a:t>
             </a:r>
           </a:p>
           <a:p>
             <a:pPr lvl="2"/>
             <a:r>
-              <a:rPr lang="en-US" smtClean="0"/>
+              <a:rPr lang="en-US"/>
               <a:t>Third level</a:t>
             </a:r>
           </a:p>
           <a:p>
             <a:pPr lvl="3"/>
             <a:r>
-              <a:rPr lang="en-US" smtClean="0"/>
+              <a:rPr lang="en-US"/>
               <a:t>Fourth level</a:t>
             </a:r>
           </a:p>
           <a:p>
             <a:pPr lvl="4"/>
             <a:r>
-              <a:rPr lang="en-US" smtClean="0"/>
+              <a:rPr lang="en-US"/>
               <a:t>Fifth level</a:t>
             </a:r>
-            <a:endParaRPr lang="en-US"/>
           </a:p>
         </p:txBody>
       </p:sp>
@@ -1361,7 +3956,7 @@
           <a:p>
             <a:fld id="{5BCAD085-E8A6-8845-BD4E-CB4CCA059FC4}" type="datetimeFigureOut">
               <a:rPr lang="en-US" smtClean="0"/>
-              <a:t>1/27/13</a:t>
+              <a:t>4/29/2026</a:t>
             </a:fld>
             <a:endParaRPr lang="en-US"/>
           </a:p>
@@ -1459,10 +4054,9 @@
           </a:lstStyle>
           <a:p>
             <a:r>
-              <a:rPr lang="en-US" smtClean="0"/>
+              <a:rPr lang="en-US"/>
               <a:t>Click to edit Master title style</a:t>
             </a:r>
-            <a:endParaRPr lang="en-US"/>
           </a:p>
         </p:txBody>
       </p:sp>
@@ -1525,7 +4119,7 @@
           <a:p>
             <a:pPr lvl="0"/>
             <a:r>
-              <a:rPr lang="en-US" smtClean="0"/>
+              <a:rPr lang="en-US"/>
               <a:t>Click to edit Master text styles</a:t>
             </a:r>
           </a:p>
@@ -1581,38 +4175,37 @@
           <a:p>
             <a:pPr lvl="0"/>
             <a:r>
-              <a:rPr lang="en-US" smtClean="0"/>
+              <a:rPr lang="en-US"/>
               <a:t>Click to edit Master text styles</a:t>
             </a:r>
           </a:p>
           <a:p>
             <a:pPr lvl="1"/>
             <a:r>
-              <a:rPr lang="en-US" smtClean="0"/>
+              <a:rPr lang="en-US"/>
               <a:t>Second level</a:t>
             </a:r>
           </a:p>
           <a:p>
             <a:pPr lvl="2"/>
             <a:r>
-              <a:rPr lang="en-US" smtClean="0"/>
+              <a:rPr lang="en-US"/>
               <a:t>Third level</a:t>
             </a:r>
           </a:p>
           <a:p>
             <a:pPr lvl="3"/>
             <a:r>
-              <a:rPr lang="en-US" smtClean="0"/>
+              <a:rPr lang="en-US"/>
               <a:t>Fourth level</a:t>
             </a:r>
           </a:p>
           <a:p>
             <a:pPr lvl="4"/>
             <a:r>
-              <a:rPr lang="en-US" smtClean="0"/>
+              <a:rPr lang="en-US"/>
               <a:t>Fifth level</a:t>
             </a:r>
-            <a:endParaRPr lang="en-US"/>
           </a:p>
         </p:txBody>
       </p:sp>
@@ -1675,7 +4268,7 @@
           <a:p>
             <a:pPr lvl="0"/>
             <a:r>
-              <a:rPr lang="en-US" smtClean="0"/>
+              <a:rPr lang="en-US"/>
               <a:t>Click to edit Master text styles</a:t>
             </a:r>
           </a:p>
@@ -1731,38 +4324,37 @@
           <a:p>
             <a:pPr lvl="0"/>
             <a:r>
-              <a:rPr lang="en-US" smtClean="0"/>
+              <a:rPr lang="en-US"/>
               <a:t>Click to edit Master text styles</a:t>
             </a:r>
           </a:p>
           <a:p>
             <a:pPr lvl="1"/>
             <a:r>
-              <a:rPr lang="en-US" smtClean="0"/>
+              <a:rPr lang="en-US"/>
               <a:t>Second level</a:t>
             </a:r>
           </a:p>
           <a:p>
             <a:pPr lvl="2"/>
             <a:r>
-              <a:rPr lang="en-US" smtClean="0"/>
+              <a:rPr lang="en-US"/>
               <a:t>Third level</a:t>
             </a:r>
           </a:p>
           <a:p>
             <a:pPr lvl="3"/>
             <a:r>
-              <a:rPr lang="en-US" smtClean="0"/>
+              <a:rPr lang="en-US"/>
               <a:t>Fourth level</a:t>
             </a:r>
           </a:p>
           <a:p>
             <a:pPr lvl="4"/>
             <a:r>
-              <a:rPr lang="en-US" smtClean="0"/>
+              <a:rPr lang="en-US"/>
               <a:t>Fifth level</a:t>
             </a:r>
-            <a:endParaRPr lang="en-US"/>
           </a:p>
         </p:txBody>
       </p:sp>
@@ -1783,7 +4375,7 @@
           <a:p>
             <a:fld id="{5BCAD085-E8A6-8845-BD4E-CB4CCA059FC4}" type="datetimeFigureOut">
               <a:rPr lang="en-US" smtClean="0"/>
-              <a:t>1/27/13</a:t>
+              <a:t>4/29/2026</a:t>
             </a:fld>
             <a:endParaRPr lang="en-US"/>
           </a:p>
@@ -1877,10 +4469,9 @@
           <a:lstStyle/>
           <a:p>
             <a:r>
-              <a:rPr lang="en-US" smtClean="0"/>
+              <a:rPr lang="en-US"/>
               <a:t>Click to edit Master title style</a:t>
             </a:r>
-            <a:endParaRPr lang="en-US"/>
           </a:p>
         </p:txBody>
       </p:sp>
@@ -1901,7 +4492,7 @@
           <a:p>
             <a:fld id="{5BCAD085-E8A6-8845-BD4E-CB4CCA059FC4}" type="datetimeFigureOut">
               <a:rPr lang="en-US" smtClean="0"/>
-              <a:t>1/27/13</a:t>
+              <a:t>4/29/2026</a:t>
             </a:fld>
             <a:endParaRPr lang="en-US"/>
           </a:p>
@@ -1996,7 +4587,7 @@
           <a:p>
             <a:fld id="{5BCAD085-E8A6-8845-BD4E-CB4CCA059FC4}" type="datetimeFigureOut">
               <a:rPr lang="en-US" smtClean="0"/>
-              <a:t>1/27/13</a:t>
+              <a:t>4/29/2026</a:t>
             </a:fld>
             <a:endParaRPr lang="en-US"/>
           </a:p>
@@ -2099,10 +4690,9 @@
           </a:lstStyle>
           <a:p>
             <a:r>
-              <a:rPr lang="en-US" smtClean="0"/>
+              <a:rPr lang="en-US"/>
               <a:t>Click to edit Master title style</a:t>
             </a:r>
-            <a:endParaRPr lang="en-US"/>
           </a:p>
         </p:txBody>
       </p:sp>
@@ -2156,38 +4746,37 @@
           <a:p>
             <a:pPr lvl="0"/>
             <a:r>
-              <a:rPr lang="en-US" smtClean="0"/>
+              <a:rPr lang="en-US"/>
               <a:t>Click to edit Master text styles</a:t>
             </a:r>
           </a:p>
           <a:p>
             <a:pPr lvl="1"/>
             <a:r>
-              <a:rPr lang="en-US" smtClean="0"/>
+              <a:rPr lang="en-US"/>
               <a:t>Second level</a:t>
             </a:r>
           </a:p>
           <a:p>
             <a:pPr lvl="2"/>
             <a:r>
-              <a:rPr lang="en-US" smtClean="0"/>
+              <a:rPr lang="en-US"/>
               <a:t>Third level</a:t>
             </a:r>
           </a:p>
           <a:p>
             <a:pPr lvl="3"/>
             <a:r>
-              <a:rPr lang="en-US" smtClean="0"/>
+              <a:rPr lang="en-US"/>
               <a:t>Fourth level</a:t>
             </a:r>
           </a:p>
           <a:p>
             <a:pPr lvl="4"/>
             <a:r>
-              <a:rPr lang="en-US" smtClean="0"/>
+              <a:rPr lang="en-US"/>
               <a:t>Fifth level</a:t>
             </a:r>
-            <a:endParaRPr lang="en-US"/>
           </a:p>
         </p:txBody>
       </p:sp>
@@ -2250,7 +4839,7 @@
           <a:p>
             <a:pPr lvl="0"/>
             <a:r>
-              <a:rPr lang="en-US" smtClean="0"/>
+              <a:rPr lang="en-US"/>
               <a:t>Click to edit Master text styles</a:t>
             </a:r>
           </a:p>
@@ -2273,7 +4862,7 @@
           <a:p>
             <a:fld id="{5BCAD085-E8A6-8845-BD4E-CB4CCA059FC4}" type="datetimeFigureOut">
               <a:rPr lang="en-US" smtClean="0"/>
-              <a:t>1/27/13</a:t>
+              <a:t>4/29/2026</a:t>
             </a:fld>
             <a:endParaRPr lang="en-US"/>
           </a:p>
@@ -2376,10 +4965,9 @@
           </a:lstStyle>
           <a:p>
             <a:r>
-              <a:rPr lang="en-US" smtClean="0"/>
+              <a:rPr lang="en-US"/>
               <a:t>Click to edit Master title style</a:t>
             </a:r>
-            <a:endParaRPr lang="en-US"/>
           </a:p>
         </p:txBody>
       </p:sp>
@@ -2503,7 +5091,7 @@
           <a:p>
             <a:pPr lvl="0"/>
             <a:r>
-              <a:rPr lang="en-US" smtClean="0"/>
+              <a:rPr lang="en-US"/>
               <a:t>Click to edit Master text styles</a:t>
             </a:r>
           </a:p>
@@ -2526,7 +5114,7 @@
           <a:p>
             <a:fld id="{5BCAD085-E8A6-8845-BD4E-CB4CCA059FC4}" type="datetimeFigureOut">
               <a:rPr lang="en-US" smtClean="0"/>
-              <a:t>1/27/13</a:t>
+              <a:t>4/29/2026</a:t>
             </a:fld>
             <a:endParaRPr lang="en-US"/>
           </a:p>
@@ -2635,10 +5223,9 @@
           <a:lstStyle/>
           <a:p>
             <a:r>
-              <a:rPr lang="en-US" smtClean="0"/>
+              <a:rPr lang="en-US"/>
               <a:t>Click to edit Master title style</a:t>
             </a:r>
-            <a:endParaRPr lang="en-US"/>
           </a:p>
         </p:txBody>
       </p:sp>
@@ -2669,38 +5256,37 @@
           <a:p>
             <a:pPr lvl="0"/>
             <a:r>
-              <a:rPr lang="en-US" smtClean="0"/>
+              <a:rPr lang="en-US"/>
               <a:t>Click to edit Master text styles</a:t>
             </a:r>
           </a:p>
           <a:p>
             <a:pPr lvl="1"/>
             <a:r>
-              <a:rPr lang="en-US" smtClean="0"/>
+              <a:rPr lang="en-US"/>
               <a:t>Second level</a:t>
             </a:r>
           </a:p>
           <a:p>
             <a:pPr lvl="2"/>
             <a:r>
-              <a:rPr lang="en-US" smtClean="0"/>
+              <a:rPr lang="en-US"/>
               <a:t>Third level</a:t>
             </a:r>
           </a:p>
           <a:p>
             <a:pPr lvl="3"/>
             <a:r>
-              <a:rPr lang="en-US" smtClean="0"/>
+              <a:rPr lang="en-US"/>
               <a:t>Fourth level</a:t>
             </a:r>
           </a:p>
           <a:p>
             <a:pPr lvl="4"/>
             <a:r>
-              <a:rPr lang="en-US" smtClean="0"/>
+              <a:rPr lang="en-US"/>
               <a:t>Fifth level</a:t>
             </a:r>
-            <a:endParaRPr lang="en-US"/>
           </a:p>
         </p:txBody>
       </p:sp>
@@ -2739,7 +5325,7 @@
           <a:p>
             <a:fld id="{5BCAD085-E8A6-8845-BD4E-CB4CCA059FC4}" type="datetimeFigureOut">
               <a:rPr lang="en-US" smtClean="0"/>
-              <a:t>1/27/13</a:t>
+              <a:t>4/29/2026</a:t>
             </a:fld>
             <a:endParaRPr lang="en-US"/>
           </a:p>
@@ -3098,7 +5684,7 @@
 </file>
 
 <file path=ppt/slides/slide1.xml><?xml version="1.0" encoding="utf-8"?>
-<p:sld xmlns:a="http://schemas.openxmlformats.org/drawingml/2006/main" xmlns:p="http://schemas.openxmlformats.org/presentationml/2006/main" xmlns:r="http://schemas.openxmlformats.org/officeDocument/2006/relationships">
+<p:sld xmlns:a="http://schemas.openxmlformats.org/drawingml/2006/main" xmlns:r="http://schemas.openxmlformats.org/officeDocument/2006/relationships" xmlns:p="http://schemas.openxmlformats.org/presentationml/2006/main">
   <p:cSld>
     <p:bg>
       <p:bgPr>
@@ -3114,7 +5700,14 @@
         <p:cNvGrpSpPr/>
         <p:nvPr/>
       </p:nvGrpSpPr>
-      <p:grpSpPr/>
+      <p:grpSpPr>
+        <a:xfrm>
+          <a:off x="0" y="0"/>
+          <a:ext cx="0" cy="0"/>
+          <a:chOff x="0" y="0"/>
+          <a:chExt cx="0" cy="0"/>
+        </a:xfrm>
+      </p:grpSpPr>
       <p:sp>
         <p:nvSpPr>
           <p:cNvPr id="2" name="TextBox 1"/>
@@ -3268,7 +5861,7 @@
 </file>
 
 <file path=ppt/slides/slide10.xml><?xml version="1.0" encoding="utf-8"?>
-<p:sld xmlns:a="http://schemas.openxmlformats.org/drawingml/2006/main" xmlns:p="http://schemas.openxmlformats.org/presentationml/2006/main" xmlns:r="http://schemas.openxmlformats.org/officeDocument/2006/relationships">
+<p:sld xmlns:a="http://schemas.openxmlformats.org/drawingml/2006/main" xmlns:r="http://schemas.openxmlformats.org/officeDocument/2006/relationships" xmlns:p="http://schemas.openxmlformats.org/presentationml/2006/main">
   <p:cSld>
     <p:bg>
       <p:bgPr>
@@ -3284,7 +5877,14 @@
         <p:cNvGrpSpPr/>
         <p:nvPr/>
       </p:nvGrpSpPr>
-      <p:grpSpPr/>
+      <p:grpSpPr>
+        <a:xfrm>
+          <a:off x="0" y="0"/>
+          <a:ext cx="0" cy="0"/>
+          <a:chOff x="0" y="0"/>
+          <a:chExt cx="0" cy="0"/>
+        </a:xfrm>
+      </p:grpSpPr>
       <p:sp>
         <p:nvSpPr>
           <p:cNvPr id="2" name="TextBox 1"/>
@@ -3397,6 +5997,7 @@
           <a:lstStyle/>
           <a:p>
             <a:pPr algn="ctr"/>
+            <a:endParaRPr/>
           </a:p>
         </p:txBody>
       </p:sp>
@@ -3440,6 +6041,7 @@
           <a:lstStyle/>
           <a:p>
             <a:pPr algn="ctr"/>
+            <a:endParaRPr/>
           </a:p>
         </p:txBody>
       </p:sp>
@@ -3627,6 +6229,7 @@
           <a:lstStyle/>
           <a:p>
             <a:pPr algn="ctr"/>
+            <a:endParaRPr/>
           </a:p>
         </p:txBody>
       </p:sp>
@@ -3670,6 +6273,7 @@
           <a:lstStyle/>
           <a:p>
             <a:pPr algn="ctr"/>
+            <a:endParaRPr/>
           </a:p>
         </p:txBody>
       </p:sp>
@@ -3826,7 +6430,7 @@
 </file>
 
 <file path=ppt/slides/slide11.xml><?xml version="1.0" encoding="utf-8"?>
-<p:sld xmlns:a="http://schemas.openxmlformats.org/drawingml/2006/main" xmlns:p="http://schemas.openxmlformats.org/presentationml/2006/main" xmlns:r="http://schemas.openxmlformats.org/officeDocument/2006/relationships">
+<p:sld xmlns:a="http://schemas.openxmlformats.org/drawingml/2006/main" xmlns:r="http://schemas.openxmlformats.org/officeDocument/2006/relationships" xmlns:p="http://schemas.openxmlformats.org/presentationml/2006/main">
   <p:cSld>
     <p:bg>
       <p:bgPr>
@@ -3842,7 +6446,14 @@
         <p:cNvGrpSpPr/>
         <p:nvPr/>
       </p:nvGrpSpPr>
-      <p:grpSpPr/>
+      <p:grpSpPr>
+        <a:xfrm>
+          <a:off x="0" y="0"/>
+          <a:ext cx="0" cy="0"/>
+          <a:chOff x="0" y="0"/>
+          <a:chExt cx="0" cy="0"/>
+        </a:xfrm>
+      </p:grpSpPr>
       <p:sp>
         <p:nvSpPr>
           <p:cNvPr id="2" name="TextBox 1"/>
@@ -3919,6 +6530,7 @@
           <a:lstStyle/>
           <a:p>
             <a:pPr algn="ctr"/>
+            <a:endParaRPr/>
           </a:p>
         </p:txBody>
       </p:sp>
@@ -3962,6 +6574,7 @@
           <a:lstStyle/>
           <a:p>
             <a:pPr algn="ctr"/>
+            <a:endParaRPr/>
           </a:p>
         </p:txBody>
       </p:sp>
@@ -4139,6 +6752,7 @@
                 <a:latin typeface="Calibri"/>
               </a:defRPr>
             </a:pPr>
+            <a:endParaRPr/>
           </a:p>
         </p:txBody>
       </p:sp>
@@ -4254,6 +6868,7 @@
           <a:lstStyle/>
           <a:p>
             <a:pPr algn="ctr"/>
+            <a:endParaRPr/>
           </a:p>
         </p:txBody>
       </p:sp>
@@ -4297,6 +6912,7 @@
           <a:lstStyle/>
           <a:p>
             <a:pPr algn="ctr"/>
+            <a:endParaRPr/>
           </a:p>
         </p:txBody>
       </p:sp>
@@ -4510,6 +7126,7 @@
                 <a:latin typeface="Calibri"/>
               </a:defRPr>
             </a:pPr>
+            <a:endParaRPr/>
           </a:p>
         </p:txBody>
       </p:sp>
@@ -4594,7 +7211,7 @@
 </file>
 
 <file path=ppt/slides/slide12.xml><?xml version="1.0" encoding="utf-8"?>
-<p:sld xmlns:a="http://schemas.openxmlformats.org/drawingml/2006/main" xmlns:p="http://schemas.openxmlformats.org/presentationml/2006/main" xmlns:r="http://schemas.openxmlformats.org/officeDocument/2006/relationships">
+<p:sld xmlns:a="http://schemas.openxmlformats.org/drawingml/2006/main" xmlns:r="http://schemas.openxmlformats.org/officeDocument/2006/relationships" xmlns:p="http://schemas.openxmlformats.org/presentationml/2006/main">
   <p:cSld>
     <p:bg>
       <p:bgPr>
@@ -4610,7 +7227,14 @@
         <p:cNvGrpSpPr/>
         <p:nvPr/>
       </p:nvGrpSpPr>
-      <p:grpSpPr/>
+      <p:grpSpPr>
+        <a:xfrm>
+          <a:off x="0" y="0"/>
+          <a:ext cx="0" cy="0"/>
+          <a:chOff x="0" y="0"/>
+          <a:chExt cx="0" cy="0"/>
+        </a:xfrm>
+      </p:grpSpPr>
       <p:sp>
         <p:nvSpPr>
           <p:cNvPr id="2" name="TextBox 1"/>
@@ -4702,8 +7326,20 @@
                 <a:tableStyleId>{5C22544A-7EE6-4342-B048-85BDC9FD1C3A}</a:tableStyleId>
               </a:tblPr>
               <a:tblGrid>
-                <a:gridCol w="2743200"/>
-                <a:gridCol w="7772400"/>
+                <a:gridCol w="2743200">
+                  <a:extLst>
+                    <a:ext uri="{9D8B030D-6E8A-4147-A177-3AD203B41FA5}">
+                      <a16:colId xmlns:a16="http://schemas.microsoft.com/office/drawing/2014/main" val="20000"/>
+                    </a:ext>
+                  </a:extLst>
+                </a:gridCol>
+                <a:gridCol w="7772400">
+                  <a:extLst>
+                    <a:ext uri="{9D8B030D-6E8A-4147-A177-3AD203B41FA5}">
+                      <a16:colId xmlns:a16="http://schemas.microsoft.com/office/drawing/2014/main" val="20001"/>
+                    </a:ext>
+                  </a:extLst>
+                </a:gridCol>
               </a:tblGrid>
               <a:tr h="365760">
                 <a:tc>
@@ -4754,6 +7390,11 @@
                     </a:solidFill>
                   </a:tcPr>
                 </a:tc>
+                <a:extLst>
+                  <a:ext uri="{0D108BD9-81ED-4DB2-BD59-A6C34878D82A}">
+                    <a16:rowId xmlns:a16="http://schemas.microsoft.com/office/drawing/2014/main" val="10000"/>
+                  </a:ext>
+                </a:extLst>
               </a:tr>
               <a:tr h="365760">
                 <a:tc>
@@ -4804,6 +7445,11 @@
                     </a:solidFill>
                   </a:tcPr>
                 </a:tc>
+                <a:extLst>
+                  <a:ext uri="{0D108BD9-81ED-4DB2-BD59-A6C34878D82A}">
+                    <a16:rowId xmlns:a16="http://schemas.microsoft.com/office/drawing/2014/main" val="10001"/>
+                  </a:ext>
+                </a:extLst>
               </a:tr>
               <a:tr h="365760">
                 <a:tc>
@@ -4854,6 +7500,11 @@
                     </a:solidFill>
                   </a:tcPr>
                 </a:tc>
+                <a:extLst>
+                  <a:ext uri="{0D108BD9-81ED-4DB2-BD59-A6C34878D82A}">
+                    <a16:rowId xmlns:a16="http://schemas.microsoft.com/office/drawing/2014/main" val="10002"/>
+                  </a:ext>
+                </a:extLst>
               </a:tr>
               <a:tr h="365760">
                 <a:tc>
@@ -4904,6 +7555,11 @@
                     </a:solidFill>
                   </a:tcPr>
                 </a:tc>
+                <a:extLst>
+                  <a:ext uri="{0D108BD9-81ED-4DB2-BD59-A6C34878D82A}">
+                    <a16:rowId xmlns:a16="http://schemas.microsoft.com/office/drawing/2014/main" val="10003"/>
+                  </a:ext>
+                </a:extLst>
               </a:tr>
               <a:tr h="365760">
                 <a:tc>
@@ -4954,6 +7610,11 @@
                     </a:solidFill>
                   </a:tcPr>
                 </a:tc>
+                <a:extLst>
+                  <a:ext uri="{0D108BD9-81ED-4DB2-BD59-A6C34878D82A}">
+                    <a16:rowId xmlns:a16="http://schemas.microsoft.com/office/drawing/2014/main" val="10004"/>
+                  </a:ext>
+                </a:extLst>
               </a:tr>
             </a:tbl>
           </a:graphicData>
@@ -5008,7 +7669,7 @@
 </file>
 
 <file path=ppt/slides/slide13.xml><?xml version="1.0" encoding="utf-8"?>
-<p:sld xmlns:a="http://schemas.openxmlformats.org/drawingml/2006/main" xmlns:p="http://schemas.openxmlformats.org/presentationml/2006/main" xmlns:r="http://schemas.openxmlformats.org/officeDocument/2006/relationships">
+<p:sld xmlns:a="http://schemas.openxmlformats.org/drawingml/2006/main" xmlns:r="http://schemas.openxmlformats.org/officeDocument/2006/relationships" xmlns:p="http://schemas.openxmlformats.org/presentationml/2006/main">
   <p:cSld>
     <p:bg>
       <p:bgPr>
@@ -5024,7 +7685,14 @@
         <p:cNvGrpSpPr/>
         <p:nvPr/>
       </p:nvGrpSpPr>
-      <p:grpSpPr/>
+      <p:grpSpPr>
+        <a:xfrm>
+          <a:off x="0" y="0"/>
+          <a:ext cx="0" cy="0"/>
+          <a:chOff x="0" y="0"/>
+          <a:chExt cx="0" cy="0"/>
+        </a:xfrm>
+      </p:grpSpPr>
       <p:sp>
         <p:nvSpPr>
           <p:cNvPr id="2" name="TextBox 1"/>
@@ -5137,6 +7805,7 @@
           <a:lstStyle/>
           <a:p>
             <a:pPr algn="ctr"/>
+            <a:endParaRPr/>
           </a:p>
         </p:txBody>
       </p:sp>
@@ -5180,6 +7849,7 @@
           <a:lstStyle/>
           <a:p>
             <a:pPr algn="ctr"/>
+            <a:endParaRPr/>
           </a:p>
         </p:txBody>
       </p:sp>
@@ -5285,6 +7955,7 @@
                 <a:latin typeface="Calibri"/>
               </a:defRPr>
             </a:pPr>
+            <a:endParaRPr/>
           </a:p>
         </p:txBody>
       </p:sp>
@@ -5390,6 +8061,7 @@
                 <a:latin typeface="Calibri"/>
               </a:defRPr>
             </a:pPr>
+            <a:endParaRPr/>
           </a:p>
         </p:txBody>
       </p:sp>
@@ -5495,6 +8167,7 @@
                 <a:latin typeface="Calibri"/>
               </a:defRPr>
             </a:pPr>
+            <a:endParaRPr/>
           </a:p>
         </p:txBody>
       </p:sp>
@@ -5564,6 +8237,7 @@
                 <a:latin typeface="Calibri"/>
               </a:defRPr>
             </a:pPr>
+            <a:endParaRPr/>
           </a:p>
         </p:txBody>
       </p:sp>
@@ -5612,7 +8286,7 @@
 </file>
 
 <file path=ppt/slides/slide14.xml><?xml version="1.0" encoding="utf-8"?>
-<p:sld xmlns:a="http://schemas.openxmlformats.org/drawingml/2006/main" xmlns:p="http://schemas.openxmlformats.org/presentationml/2006/main" xmlns:r="http://schemas.openxmlformats.org/officeDocument/2006/relationships">
+<p:sld xmlns:a="http://schemas.openxmlformats.org/drawingml/2006/main" xmlns:r="http://schemas.openxmlformats.org/officeDocument/2006/relationships" xmlns:p="http://schemas.openxmlformats.org/presentationml/2006/main">
   <p:cSld>
     <p:bg>
       <p:bgPr>
@@ -5628,7 +8302,14 @@
         <p:cNvGrpSpPr/>
         <p:nvPr/>
       </p:nvGrpSpPr>
-      <p:grpSpPr/>
+      <p:grpSpPr>
+        <a:xfrm>
+          <a:off x="0" y="0"/>
+          <a:ext cx="0" cy="0"/>
+          <a:chOff x="0" y="0"/>
+          <a:chExt cx="0" cy="0"/>
+        </a:xfrm>
+      </p:grpSpPr>
       <p:sp>
         <p:nvSpPr>
           <p:cNvPr id="2" name="TextBox 1"/>
@@ -5705,6 +8386,7 @@
           <a:lstStyle/>
           <a:p>
             <a:pPr algn="ctr"/>
+            <a:endParaRPr/>
           </a:p>
         </p:txBody>
       </p:sp>
@@ -5748,6 +8430,7 @@
           <a:lstStyle/>
           <a:p>
             <a:pPr algn="ctr"/>
+            <a:endParaRPr/>
           </a:p>
         </p:txBody>
       </p:sp>
@@ -5925,6 +8608,7 @@
                 <a:latin typeface="Calibri"/>
               </a:defRPr>
             </a:pPr>
+            <a:endParaRPr/>
           </a:p>
         </p:txBody>
       </p:sp>
@@ -5968,6 +8652,7 @@
           <a:lstStyle/>
           <a:p>
             <a:pPr algn="ctr"/>
+            <a:endParaRPr/>
           </a:p>
         </p:txBody>
       </p:sp>
@@ -6011,6 +8696,7 @@
           <a:lstStyle/>
           <a:p>
             <a:pPr algn="ctr"/>
+            <a:endParaRPr/>
           </a:p>
         </p:txBody>
       </p:sp>
@@ -6234,6 +8920,7 @@
           <a:lstStyle/>
           <a:p>
             <a:pPr algn="ctr"/>
+            <a:endParaRPr/>
           </a:p>
         </p:txBody>
       </p:sp>
@@ -6277,6 +8964,7 @@
           <a:lstStyle/>
           <a:p>
             <a:pPr algn="ctr"/>
+            <a:endParaRPr/>
           </a:p>
         </p:txBody>
       </p:sp>
@@ -6505,7 +9193,7 @@
 </file>
 
 <file path=ppt/slides/slide15.xml><?xml version="1.0" encoding="utf-8"?>
-<p:sld xmlns:a="http://schemas.openxmlformats.org/drawingml/2006/main" xmlns:p="http://schemas.openxmlformats.org/presentationml/2006/main" xmlns:r="http://schemas.openxmlformats.org/officeDocument/2006/relationships">
+<p:sld xmlns:a="http://schemas.openxmlformats.org/drawingml/2006/main" xmlns:r="http://schemas.openxmlformats.org/officeDocument/2006/relationships" xmlns:p="http://schemas.openxmlformats.org/presentationml/2006/main">
   <p:cSld>
     <p:bg>
       <p:bgPr>
@@ -6521,7 +9209,14 @@
         <p:cNvGrpSpPr/>
         <p:nvPr/>
       </p:nvGrpSpPr>
-      <p:grpSpPr/>
+      <p:grpSpPr>
+        <a:xfrm>
+          <a:off x="0" y="0"/>
+          <a:ext cx="0" cy="0"/>
+          <a:chOff x="0" y="0"/>
+          <a:chExt cx="0" cy="0"/>
+        </a:xfrm>
+      </p:grpSpPr>
       <p:sp>
         <p:nvSpPr>
           <p:cNvPr id="2" name="TextBox 1"/>
@@ -6598,6 +9293,7 @@
           <a:lstStyle/>
           <a:p>
             <a:pPr algn="ctr"/>
+            <a:endParaRPr/>
           </a:p>
         </p:txBody>
       </p:sp>
@@ -6641,6 +9337,7 @@
           <a:lstStyle/>
           <a:p>
             <a:pPr algn="ctr"/>
+            <a:endParaRPr/>
           </a:p>
         </p:txBody>
       </p:sp>
@@ -6792,6 +9489,7 @@
           <a:lstStyle/>
           <a:p>
             <a:pPr algn="ctr"/>
+            <a:endParaRPr/>
           </a:p>
         </p:txBody>
       </p:sp>
@@ -6835,6 +9533,7 @@
           <a:lstStyle/>
           <a:p>
             <a:pPr algn="ctr"/>
+            <a:endParaRPr/>
           </a:p>
         </p:txBody>
       </p:sp>
@@ -6986,6 +9685,7 @@
           <a:lstStyle/>
           <a:p>
             <a:pPr algn="ctr"/>
+            <a:endParaRPr/>
           </a:p>
         </p:txBody>
       </p:sp>
@@ -7029,6 +9729,7 @@
           <a:lstStyle/>
           <a:p>
             <a:pPr algn="ctr"/>
+            <a:endParaRPr/>
           </a:p>
         </p:txBody>
       </p:sp>
@@ -7180,6 +9881,7 @@
           <a:lstStyle/>
           <a:p>
             <a:pPr algn="ctr"/>
+            <a:endParaRPr/>
           </a:p>
         </p:txBody>
       </p:sp>
@@ -7223,6 +9925,7 @@
           <a:lstStyle/>
           <a:p>
             <a:pPr algn="ctr"/>
+            <a:endParaRPr/>
           </a:p>
         </p:txBody>
       </p:sp>
@@ -7391,7 +10094,7 @@
 </file>
 
 <file path=ppt/slides/slide16.xml><?xml version="1.0" encoding="utf-8"?>
-<p:sld xmlns:a="http://schemas.openxmlformats.org/drawingml/2006/main" xmlns:p="http://schemas.openxmlformats.org/presentationml/2006/main" xmlns:r="http://schemas.openxmlformats.org/officeDocument/2006/relationships">
+<p:sld xmlns:a="http://schemas.openxmlformats.org/drawingml/2006/main" xmlns:r="http://schemas.openxmlformats.org/officeDocument/2006/relationships" xmlns:p="http://schemas.openxmlformats.org/presentationml/2006/main">
   <p:cSld>
     <p:bg>
       <p:bgPr>
@@ -7407,7 +10110,14 @@
         <p:cNvGrpSpPr/>
         <p:nvPr/>
       </p:nvGrpSpPr>
-      <p:grpSpPr/>
+      <p:grpSpPr>
+        <a:xfrm>
+          <a:off x="0" y="0"/>
+          <a:ext cx="0" cy="0"/>
+          <a:chOff x="0" y="0"/>
+          <a:chExt cx="0" cy="0"/>
+        </a:xfrm>
+      </p:grpSpPr>
       <p:sp>
         <p:nvSpPr>
           <p:cNvPr id="2" name="TextBox 1"/>
@@ -7484,6 +10194,7 @@
           <a:lstStyle/>
           <a:p>
             <a:pPr algn="ctr"/>
+            <a:endParaRPr/>
           </a:p>
         </p:txBody>
       </p:sp>
@@ -7527,6 +10238,7 @@
           <a:lstStyle/>
           <a:p>
             <a:pPr algn="ctr"/>
+            <a:endParaRPr/>
           </a:p>
         </p:txBody>
       </p:sp>
@@ -7750,6 +10462,7 @@
           <a:lstStyle/>
           <a:p>
             <a:pPr algn="ctr"/>
+            <a:endParaRPr/>
           </a:p>
         </p:txBody>
       </p:sp>
@@ -7793,6 +10506,7 @@
           <a:lstStyle/>
           <a:p>
             <a:pPr algn="ctr"/>
+            <a:endParaRPr/>
           </a:p>
         </p:txBody>
       </p:sp>
@@ -7980,6 +10694,7 @@
           <a:lstStyle/>
           <a:p>
             <a:pPr algn="ctr"/>
+            <a:endParaRPr/>
           </a:p>
         </p:txBody>
       </p:sp>
@@ -8023,6 +10738,7 @@
           <a:lstStyle/>
           <a:p>
             <a:pPr algn="ctr"/>
+            <a:endParaRPr/>
           </a:p>
         </p:txBody>
       </p:sp>
@@ -8246,6 +10962,7 @@
           <a:lstStyle/>
           <a:p>
             <a:pPr algn="ctr"/>
+            <a:endParaRPr/>
           </a:p>
         </p:txBody>
       </p:sp>
@@ -8289,6 +11006,7 @@
           <a:lstStyle/>
           <a:p>
             <a:pPr algn="ctr"/>
+            <a:endParaRPr/>
           </a:p>
         </p:txBody>
       </p:sp>
@@ -8548,6 +11266,7 @@
           <a:lstStyle/>
           <a:p>
             <a:pPr algn="ctr"/>
+            <a:endParaRPr/>
           </a:p>
         </p:txBody>
       </p:sp>
@@ -8591,6 +11310,7 @@
           <a:lstStyle/>
           <a:p>
             <a:pPr algn="ctr"/>
+            <a:endParaRPr/>
           </a:p>
         </p:txBody>
       </p:sp>
@@ -8819,7 +11539,7 @@
 </file>
 
 <file path=ppt/slides/slide17.xml><?xml version="1.0" encoding="utf-8"?>
-<p:sld xmlns:a="http://schemas.openxmlformats.org/drawingml/2006/main" xmlns:p="http://schemas.openxmlformats.org/presentationml/2006/main" xmlns:r="http://schemas.openxmlformats.org/officeDocument/2006/relationships">
+<p:sld xmlns:a="http://schemas.openxmlformats.org/drawingml/2006/main" xmlns:r="http://schemas.openxmlformats.org/officeDocument/2006/relationships" xmlns:p="http://schemas.openxmlformats.org/presentationml/2006/main">
   <p:cSld>
     <p:bg>
       <p:bgPr>
@@ -8835,7 +11555,14 @@
         <p:cNvGrpSpPr/>
         <p:nvPr/>
       </p:nvGrpSpPr>
-      <p:grpSpPr/>
+      <p:grpSpPr>
+        <a:xfrm>
+          <a:off x="0" y="0"/>
+          <a:ext cx="0" cy="0"/>
+          <a:chOff x="0" y="0"/>
+          <a:chExt cx="0" cy="0"/>
+        </a:xfrm>
+      </p:grpSpPr>
       <p:sp>
         <p:nvSpPr>
           <p:cNvPr id="2" name="TextBox 1"/>
@@ -8912,6 +11639,7 @@
           <a:lstStyle/>
           <a:p>
             <a:pPr algn="ctr"/>
+            <a:endParaRPr/>
           </a:p>
         </p:txBody>
       </p:sp>
@@ -8955,6 +11683,7 @@
           <a:lstStyle/>
           <a:p>
             <a:pPr algn="ctr"/>
+            <a:endParaRPr/>
           </a:p>
         </p:txBody>
       </p:sp>
@@ -9204,6 +11933,7 @@
                 <a:latin typeface="Calibri"/>
               </a:defRPr>
             </a:pPr>
+            <a:endParaRPr/>
           </a:p>
         </p:txBody>
       </p:sp>
@@ -9319,6 +12049,7 @@
           <a:lstStyle/>
           <a:p>
             <a:pPr algn="ctr"/>
+            <a:endParaRPr/>
           </a:p>
         </p:txBody>
       </p:sp>
@@ -9362,6 +12093,7 @@
           <a:lstStyle/>
           <a:p>
             <a:pPr algn="ctr"/>
+            <a:endParaRPr/>
           </a:p>
         </p:txBody>
       </p:sp>
@@ -9611,6 +12343,7 @@
                 <a:latin typeface="Calibri"/>
               </a:defRPr>
             </a:pPr>
+            <a:endParaRPr/>
           </a:p>
         </p:txBody>
       </p:sp>
@@ -9726,6 +12459,7 @@
           <a:lstStyle/>
           <a:p>
             <a:pPr algn="ctr"/>
+            <a:endParaRPr/>
           </a:p>
         </p:txBody>
       </p:sp>
@@ -9769,6 +12503,7 @@
           <a:lstStyle/>
           <a:p>
             <a:pPr algn="ctr"/>
+            <a:endParaRPr/>
           </a:p>
         </p:txBody>
       </p:sp>
@@ -10018,6 +12753,7 @@
                 <a:latin typeface="Calibri"/>
               </a:defRPr>
             </a:pPr>
+            <a:endParaRPr/>
           </a:p>
         </p:txBody>
       </p:sp>
@@ -10138,7 +12874,7 @@
 </file>
 
 <file path=ppt/slides/slide18.xml><?xml version="1.0" encoding="utf-8"?>
-<p:sld xmlns:a="http://schemas.openxmlformats.org/drawingml/2006/main" xmlns:p="http://schemas.openxmlformats.org/presentationml/2006/main" xmlns:r="http://schemas.openxmlformats.org/officeDocument/2006/relationships">
+<p:sld xmlns:a="http://schemas.openxmlformats.org/drawingml/2006/main" xmlns:r="http://schemas.openxmlformats.org/officeDocument/2006/relationships" xmlns:p="http://schemas.openxmlformats.org/presentationml/2006/main">
   <p:cSld>
     <p:bg>
       <p:bgPr>
@@ -10154,7 +12890,14 @@
         <p:cNvGrpSpPr/>
         <p:nvPr/>
       </p:nvGrpSpPr>
-      <p:grpSpPr/>
+      <p:grpSpPr>
+        <a:xfrm>
+          <a:off x="0" y="0"/>
+          <a:ext cx="0" cy="0"/>
+          <a:chOff x="0" y="0"/>
+          <a:chExt cx="0" cy="0"/>
+        </a:xfrm>
+      </p:grpSpPr>
       <p:sp>
         <p:nvSpPr>
           <p:cNvPr id="2" name="TextBox 1"/>
@@ -10272,7 +13015,7 @@
 </file>
 
 <file path=ppt/slides/slide19.xml><?xml version="1.0" encoding="utf-8"?>
-<p:sld xmlns:a="http://schemas.openxmlformats.org/drawingml/2006/main" xmlns:p="http://schemas.openxmlformats.org/presentationml/2006/main" xmlns:r="http://schemas.openxmlformats.org/officeDocument/2006/relationships">
+<p:sld xmlns:a="http://schemas.openxmlformats.org/drawingml/2006/main" xmlns:r="http://schemas.openxmlformats.org/officeDocument/2006/relationships" xmlns:p="http://schemas.openxmlformats.org/presentationml/2006/main">
   <p:cSld>
     <p:bg>
       <p:bgPr>
@@ -10288,7 +13031,14 @@
         <p:cNvGrpSpPr/>
         <p:nvPr/>
       </p:nvGrpSpPr>
-      <p:grpSpPr/>
+      <p:grpSpPr>
+        <a:xfrm>
+          <a:off x="0" y="0"/>
+          <a:ext cx="0" cy="0"/>
+          <a:chOff x="0" y="0"/>
+          <a:chExt cx="0" cy="0"/>
+        </a:xfrm>
+      </p:grpSpPr>
       <p:sp>
         <p:nvSpPr>
           <p:cNvPr id="2" name="TextBox 1"/>
@@ -10401,6 +13151,7 @@
           <a:lstStyle/>
           <a:p>
             <a:pPr algn="ctr"/>
+            <a:endParaRPr/>
           </a:p>
         </p:txBody>
       </p:sp>
@@ -10444,6 +13195,7 @@
           <a:lstStyle/>
           <a:p>
             <a:pPr algn="ctr"/>
+            <a:endParaRPr/>
           </a:p>
         </p:txBody>
       </p:sp>
@@ -10631,6 +13383,7 @@
           <a:lstStyle/>
           <a:p>
             <a:pPr algn="ctr"/>
+            <a:endParaRPr/>
           </a:p>
         </p:txBody>
       </p:sp>
@@ -10674,6 +13427,7 @@
           <a:lstStyle/>
           <a:p>
             <a:pPr algn="ctr"/>
+            <a:endParaRPr/>
           </a:p>
         </p:txBody>
       </p:sp>
@@ -10861,6 +13615,7 @@
           <a:lstStyle/>
           <a:p>
             <a:pPr algn="ctr"/>
+            <a:endParaRPr/>
           </a:p>
         </p:txBody>
       </p:sp>
@@ -10904,6 +13659,7 @@
           <a:lstStyle/>
           <a:p>
             <a:pPr algn="ctr"/>
+            <a:endParaRPr/>
           </a:p>
         </p:txBody>
       </p:sp>
@@ -11060,7 +13816,7 @@
 </file>
 
 <file path=ppt/slides/slide2.xml><?xml version="1.0" encoding="utf-8"?>
-<p:sld xmlns:a="http://schemas.openxmlformats.org/drawingml/2006/main" xmlns:p="http://schemas.openxmlformats.org/presentationml/2006/main" xmlns:r="http://schemas.openxmlformats.org/officeDocument/2006/relationships">
+<p:sld xmlns:a="http://schemas.openxmlformats.org/drawingml/2006/main" xmlns:r="http://schemas.openxmlformats.org/officeDocument/2006/relationships" xmlns:p="http://schemas.openxmlformats.org/presentationml/2006/main">
   <p:cSld>
     <p:bg>
       <p:bgPr>
@@ -11076,7 +13832,14 @@
         <p:cNvGrpSpPr/>
         <p:nvPr/>
       </p:nvGrpSpPr>
-      <p:grpSpPr/>
+      <p:grpSpPr>
+        <a:xfrm>
+          <a:off x="0" y="0"/>
+          <a:ext cx="0" cy="0"/>
+          <a:chOff x="0" y="0"/>
+          <a:chExt cx="0" cy="0"/>
+        </a:xfrm>
+      </p:grpSpPr>
       <p:sp>
         <p:nvSpPr>
           <p:cNvPr id="2" name="TextBox 1"/>
@@ -11153,6 +13916,7 @@
           <a:lstStyle/>
           <a:p>
             <a:pPr algn="ctr"/>
+            <a:endParaRPr/>
           </a:p>
         </p:txBody>
       </p:sp>
@@ -11196,6 +13960,7 @@
           <a:lstStyle/>
           <a:p>
             <a:pPr algn="ctr"/>
+            <a:endParaRPr/>
           </a:p>
         </p:txBody>
       </p:sp>
@@ -11301,6 +14066,7 @@
                 <a:latin typeface="Calibri"/>
               </a:defRPr>
             </a:pPr>
+            <a:endParaRPr/>
           </a:p>
         </p:txBody>
       </p:sp>
@@ -11478,6 +14244,7 @@
                 <a:latin typeface="Calibri"/>
               </a:defRPr>
             </a:pPr>
+            <a:endParaRPr/>
           </a:p>
         </p:txBody>
       </p:sp>
@@ -11557,6 +14324,7 @@
           <a:lstStyle/>
           <a:p>
             <a:pPr algn="ctr"/>
+            <a:endParaRPr/>
           </a:p>
         </p:txBody>
       </p:sp>
@@ -11600,6 +14368,7 @@
           <a:lstStyle/>
           <a:p>
             <a:pPr algn="ctr"/>
+            <a:endParaRPr/>
           </a:p>
         </p:txBody>
       </p:sp>
@@ -11705,6 +14474,7 @@
                 <a:latin typeface="Calibri"/>
               </a:defRPr>
             </a:pPr>
+            <a:endParaRPr/>
           </a:p>
         </p:txBody>
       </p:sp>
@@ -11882,6 +14652,7 @@
                 <a:latin typeface="Calibri"/>
               </a:defRPr>
             </a:pPr>
+            <a:endParaRPr/>
           </a:p>
         </p:txBody>
       </p:sp>
@@ -11966,7 +14737,7 @@
 </file>
 
 <file path=ppt/slides/slide20.xml><?xml version="1.0" encoding="utf-8"?>
-<p:sld xmlns:a="http://schemas.openxmlformats.org/drawingml/2006/main" xmlns:p="http://schemas.openxmlformats.org/presentationml/2006/main" xmlns:r="http://schemas.openxmlformats.org/officeDocument/2006/relationships">
+<p:sld xmlns:a="http://schemas.openxmlformats.org/drawingml/2006/main" xmlns:r="http://schemas.openxmlformats.org/officeDocument/2006/relationships" xmlns:p="http://schemas.openxmlformats.org/presentationml/2006/main">
   <p:cSld>
     <p:bg>
       <p:bgPr>
@@ -11982,7 +14753,14 @@
         <p:cNvGrpSpPr/>
         <p:nvPr/>
       </p:nvGrpSpPr>
-      <p:grpSpPr/>
+      <p:grpSpPr>
+        <a:xfrm>
+          <a:off x="0" y="0"/>
+          <a:ext cx="0" cy="0"/>
+          <a:chOff x="0" y="0"/>
+          <a:chExt cx="0" cy="0"/>
+        </a:xfrm>
+      </p:grpSpPr>
       <p:sp>
         <p:nvSpPr>
           <p:cNvPr id="2" name="TextBox 1"/>
@@ -12029,7 +14807,7 @@
         </p:nvGraphicFramePr>
         <p:xfrm>
           <a:off x="731520" y="1188720"/>
-          <a:ext cx="10424160" cy="1463040"/>
+          <a:ext cx="10424160" cy="1828800"/>
         </p:xfrm>
         <a:graphic>
           <a:graphicData uri="http://schemas.openxmlformats.org/drawingml/2006/table">
@@ -12038,9 +14816,27 @@
                 <a:tableStyleId>{5C22544A-7EE6-4342-B048-85BDC9FD1C3A}</a:tableStyleId>
               </a:tblPr>
               <a:tblGrid>
-                <a:gridCol w="3474720"/>
-                <a:gridCol w="3474720"/>
-                <a:gridCol w="3474720"/>
+                <a:gridCol w="3474720">
+                  <a:extLst>
+                    <a:ext uri="{9D8B030D-6E8A-4147-A177-3AD203B41FA5}">
+                      <a16:colId xmlns:a16="http://schemas.microsoft.com/office/drawing/2014/main" val="20000"/>
+                    </a:ext>
+                  </a:extLst>
+                </a:gridCol>
+                <a:gridCol w="3474720">
+                  <a:extLst>
+                    <a:ext uri="{9D8B030D-6E8A-4147-A177-3AD203B41FA5}">
+                      <a16:colId xmlns:a16="http://schemas.microsoft.com/office/drawing/2014/main" val="20001"/>
+                    </a:ext>
+                  </a:extLst>
+                </a:gridCol>
+                <a:gridCol w="3474720">
+                  <a:extLst>
+                    <a:ext uri="{9D8B030D-6E8A-4147-A177-3AD203B41FA5}">
+                      <a16:colId xmlns:a16="http://schemas.microsoft.com/office/drawing/2014/main" val="20002"/>
+                    </a:ext>
+                  </a:extLst>
+                </a:gridCol>
               </a:tblGrid>
               <a:tr h="365760">
                 <a:tc>
@@ -12115,6 +14911,11 @@
                     </a:solidFill>
                   </a:tcPr>
                 </a:tc>
+                <a:extLst>
+                  <a:ext uri="{0D108BD9-81ED-4DB2-BD59-A6C34878D82A}">
+                    <a16:rowId xmlns:a16="http://schemas.microsoft.com/office/drawing/2014/main" val="10000"/>
+                  </a:ext>
+                </a:extLst>
               </a:tr>
               <a:tr h="365760">
                 <a:tc>
@@ -12215,6 +15016,11 @@
                     </a:solidFill>
                   </a:tcPr>
                 </a:tc>
+                <a:extLst>
+                  <a:ext uri="{0D108BD9-81ED-4DB2-BD59-A6C34878D82A}">
+                    <a16:rowId xmlns:a16="http://schemas.microsoft.com/office/drawing/2014/main" val="10001"/>
+                  </a:ext>
+                </a:extLst>
               </a:tr>
               <a:tr h="365760">
                 <a:tc>
@@ -12302,6 +15108,11 @@
                     </a:solidFill>
                   </a:tcPr>
                 </a:tc>
+                <a:extLst>
+                  <a:ext uri="{0D108BD9-81ED-4DB2-BD59-A6C34878D82A}">
+                    <a16:rowId xmlns:a16="http://schemas.microsoft.com/office/drawing/2014/main" val="10002"/>
+                  </a:ext>
+                </a:extLst>
               </a:tr>
               <a:tr h="365760">
                 <a:tc>
@@ -12402,6 +15213,11 @@
                     </a:solidFill>
                   </a:tcPr>
                 </a:tc>
+                <a:extLst>
+                  <a:ext uri="{0D108BD9-81ED-4DB2-BD59-A6C34878D82A}">
+                    <a16:rowId xmlns:a16="http://schemas.microsoft.com/office/drawing/2014/main" val="10003"/>
+                  </a:ext>
+                </a:extLst>
               </a:tr>
             </a:tbl>
           </a:graphicData>
@@ -12524,7 +15340,7 @@
 </file>
 
 <file path=ppt/slides/slide3.xml><?xml version="1.0" encoding="utf-8"?>
-<p:sld xmlns:a="http://schemas.openxmlformats.org/drawingml/2006/main" xmlns:p="http://schemas.openxmlformats.org/presentationml/2006/main" xmlns:r="http://schemas.openxmlformats.org/officeDocument/2006/relationships">
+<p:sld xmlns:a="http://schemas.openxmlformats.org/drawingml/2006/main" xmlns:r="http://schemas.openxmlformats.org/officeDocument/2006/relationships" xmlns:p="http://schemas.openxmlformats.org/presentationml/2006/main">
   <p:cSld>
     <p:bg>
       <p:bgPr>
@@ -12540,7 +15356,14 @@
         <p:cNvGrpSpPr/>
         <p:nvPr/>
       </p:nvGrpSpPr>
-      <p:grpSpPr/>
+      <p:grpSpPr>
+        <a:xfrm>
+          <a:off x="0" y="0"/>
+          <a:ext cx="0" cy="0"/>
+          <a:chOff x="0" y="0"/>
+          <a:chExt cx="0" cy="0"/>
+        </a:xfrm>
+      </p:grpSpPr>
       <p:sp>
         <p:nvSpPr>
           <p:cNvPr id="2" name="TextBox 1"/>
@@ -12632,9 +15455,27 @@
                 <a:tableStyleId>{5C22544A-7EE6-4342-B048-85BDC9FD1C3A}</a:tableStyleId>
               </a:tblPr>
               <a:tblGrid>
-                <a:gridCol w="2743200"/>
-                <a:gridCol w="4114800"/>
-                <a:gridCol w="3840480"/>
+                <a:gridCol w="2743200">
+                  <a:extLst>
+                    <a:ext uri="{9D8B030D-6E8A-4147-A177-3AD203B41FA5}">
+                      <a16:colId xmlns:a16="http://schemas.microsoft.com/office/drawing/2014/main" val="20000"/>
+                    </a:ext>
+                  </a:extLst>
+                </a:gridCol>
+                <a:gridCol w="4114800">
+                  <a:extLst>
+                    <a:ext uri="{9D8B030D-6E8A-4147-A177-3AD203B41FA5}">
+                      <a16:colId xmlns:a16="http://schemas.microsoft.com/office/drawing/2014/main" val="20001"/>
+                    </a:ext>
+                  </a:extLst>
+                </a:gridCol>
+                <a:gridCol w="3840480">
+                  <a:extLst>
+                    <a:ext uri="{9D8B030D-6E8A-4147-A177-3AD203B41FA5}">
+                      <a16:colId xmlns:a16="http://schemas.microsoft.com/office/drawing/2014/main" val="20002"/>
+                    </a:ext>
+                  </a:extLst>
+                </a:gridCol>
               </a:tblGrid>
               <a:tr h="365760">
                 <a:tc>
@@ -12709,6 +15550,11 @@
                     </a:solidFill>
                   </a:tcPr>
                 </a:tc>
+                <a:extLst>
+                  <a:ext uri="{0D108BD9-81ED-4DB2-BD59-A6C34878D82A}">
+                    <a16:rowId xmlns:a16="http://schemas.microsoft.com/office/drawing/2014/main" val="10000"/>
+                  </a:ext>
+                </a:extLst>
               </a:tr>
               <a:tr h="365760">
                 <a:tc>
@@ -12783,6 +15629,11 @@
                     </a:solidFill>
                   </a:tcPr>
                 </a:tc>
+                <a:extLst>
+                  <a:ext uri="{0D108BD9-81ED-4DB2-BD59-A6C34878D82A}">
+                    <a16:rowId xmlns:a16="http://schemas.microsoft.com/office/drawing/2014/main" val="10001"/>
+                  </a:ext>
+                </a:extLst>
               </a:tr>
               <a:tr h="365760">
                 <a:tc>
@@ -12857,6 +15708,11 @@
                     </a:solidFill>
                   </a:tcPr>
                 </a:tc>
+                <a:extLst>
+                  <a:ext uri="{0D108BD9-81ED-4DB2-BD59-A6C34878D82A}">
+                    <a16:rowId xmlns:a16="http://schemas.microsoft.com/office/drawing/2014/main" val="10002"/>
+                  </a:ext>
+                </a:extLst>
               </a:tr>
               <a:tr h="365760">
                 <a:tc>
@@ -12931,6 +15787,11 @@
                     </a:solidFill>
                   </a:tcPr>
                 </a:tc>
+                <a:extLst>
+                  <a:ext uri="{0D108BD9-81ED-4DB2-BD59-A6C34878D82A}">
+                    <a16:rowId xmlns:a16="http://schemas.microsoft.com/office/drawing/2014/main" val="10003"/>
+                  </a:ext>
+                </a:extLst>
               </a:tr>
               <a:tr h="365760">
                 <a:tc>
@@ -13005,6 +15866,11 @@
                     </a:solidFill>
                   </a:tcPr>
                 </a:tc>
+                <a:extLst>
+                  <a:ext uri="{0D108BD9-81ED-4DB2-BD59-A6C34878D82A}">
+                    <a16:rowId xmlns:a16="http://schemas.microsoft.com/office/drawing/2014/main" val="10004"/>
+                  </a:ext>
+                </a:extLst>
               </a:tr>
               <a:tr h="365760">
                 <a:tc>
@@ -13079,6 +15945,11 @@
                     </a:solidFill>
                   </a:tcPr>
                 </a:tc>
+                <a:extLst>
+                  <a:ext uri="{0D108BD9-81ED-4DB2-BD59-A6C34878D82A}">
+                    <a16:rowId xmlns:a16="http://schemas.microsoft.com/office/drawing/2014/main" val="10005"/>
+                  </a:ext>
+                </a:extLst>
               </a:tr>
             </a:tbl>
           </a:graphicData>
@@ -13129,7 +16000,7 @@
 </file>
 
 <file path=ppt/slides/slide4.xml><?xml version="1.0" encoding="utf-8"?>
-<p:sld xmlns:a="http://schemas.openxmlformats.org/drawingml/2006/main" xmlns:p="http://schemas.openxmlformats.org/presentationml/2006/main" xmlns:r="http://schemas.openxmlformats.org/officeDocument/2006/relationships">
+<p:sld xmlns:a="http://schemas.openxmlformats.org/drawingml/2006/main" xmlns:r="http://schemas.openxmlformats.org/officeDocument/2006/relationships" xmlns:p="http://schemas.openxmlformats.org/presentationml/2006/main">
   <p:cSld>
     <p:bg>
       <p:bgPr>
@@ -13145,7 +16016,14 @@
         <p:cNvGrpSpPr/>
         <p:nvPr/>
       </p:nvGrpSpPr>
-      <p:grpSpPr/>
+      <p:grpSpPr>
+        <a:xfrm>
+          <a:off x="0" y="0"/>
+          <a:ext cx="0" cy="0"/>
+          <a:chOff x="0" y="0"/>
+          <a:chExt cx="0" cy="0"/>
+        </a:xfrm>
+      </p:grpSpPr>
       <p:sp>
         <p:nvSpPr>
           <p:cNvPr id="2" name="TextBox 1"/>
@@ -13258,6 +16136,7 @@
           <a:lstStyle/>
           <a:p>
             <a:pPr algn="ctr"/>
+            <a:endParaRPr/>
           </a:p>
         </p:txBody>
       </p:sp>
@@ -13301,6 +16180,7 @@
           <a:lstStyle/>
           <a:p>
             <a:pPr algn="ctr"/>
+            <a:endParaRPr/>
           </a:p>
         </p:txBody>
       </p:sp>
@@ -13384,7 +16264,7 @@
         </p:nvSpPr>
         <p:spPr>
           <a:xfrm>
-            <a:off x="640080" y="2770632"/>
+            <a:off x="640080" y="2937401"/>
             <a:ext cx="2194560" cy="274320"/>
           </a:xfrm>
           <a:prstGeom prst="rect">
@@ -13407,7 +16287,12 @@
               </a:defRPr>
             </a:pPr>
             <a:r>
-              <a:t>about section, featured projects</a:t>
+              <a:rPr lang="en-IN" dirty="0"/>
+              <a:t>about </a:t>
+            </a:r>
+            <a:r>
+              <a:rPr dirty="0"/>
+              <a:t>section, featured projects</a:t>
             </a:r>
           </a:p>
         </p:txBody>
@@ -13442,42 +16327,7 @@
                 <a:latin typeface="Calibri"/>
               </a:defRPr>
             </a:pPr>
-          </a:p>
-        </p:txBody>
-      </p:sp>
-      <p:sp>
-        <p:nvSpPr>
-          <p:cNvPr id="10" name="TextBox 9"/>
-          <p:cNvSpPr txBox="1"/>
-          <p:nvPr/>
-        </p:nvSpPr>
-        <p:spPr>
-          <a:xfrm>
-            <a:off x="640080" y="3282696"/>
-            <a:ext cx="2194560" cy="274320"/>
-          </a:xfrm>
-          <a:prstGeom prst="rect">
-            <a:avLst/>
-          </a:prstGeom>
-          <a:noFill/>
-        </p:spPr>
-        <p:txBody>
-          <a:bodyPr wrap="square">
-            <a:spAutoFit/>
-          </a:bodyPr>
-          <a:lstStyle/>
-          <a:p>
-            <a:pPr algn="l">
-              <a:defRPr sz="1300" b="0">
-                <a:solidFill>
-                  <a:srgbClr val="CCCCCC"/>
-                </a:solidFill>
-                <a:latin typeface="Calibri"/>
-              </a:defRPr>
-            </a:pPr>
-            <a:r>
-              <a:t>[Add screenshot here]</a:t>
-            </a:r>
+            <a:endParaRPr/>
           </a:p>
         </p:txBody>
       </p:sp>
@@ -13521,6 +16371,7 @@
           <a:lstStyle/>
           <a:p>
             <a:pPr algn="ctr"/>
+            <a:endParaRPr/>
           </a:p>
         </p:txBody>
       </p:sp>
@@ -13564,6 +16415,7 @@
           <a:lstStyle/>
           <a:p>
             <a:pPr algn="ctr"/>
+            <a:endParaRPr/>
           </a:p>
         </p:txBody>
       </p:sp>
@@ -13705,42 +16557,7 @@
                 <a:latin typeface="Calibri"/>
               </a:defRPr>
             </a:pPr>
-          </a:p>
-        </p:txBody>
-      </p:sp>
-      <p:sp>
-        <p:nvSpPr>
-          <p:cNvPr id="17" name="TextBox 16"/>
-          <p:cNvSpPr txBox="1"/>
-          <p:nvPr/>
-        </p:nvSpPr>
-        <p:spPr>
-          <a:xfrm>
-            <a:off x="3474720" y="3282696"/>
-            <a:ext cx="2194560" cy="274320"/>
-          </a:xfrm>
-          <a:prstGeom prst="rect">
-            <a:avLst/>
-          </a:prstGeom>
-          <a:noFill/>
-        </p:spPr>
-        <p:txBody>
-          <a:bodyPr wrap="square">
-            <a:spAutoFit/>
-          </a:bodyPr>
-          <a:lstStyle/>
-          <a:p>
-            <a:pPr algn="l">
-              <a:defRPr sz="1300" b="0">
-                <a:solidFill>
-                  <a:srgbClr val="CCCCCC"/>
-                </a:solidFill>
-                <a:latin typeface="Calibri"/>
-              </a:defRPr>
-            </a:pPr>
-            <a:r>
-              <a:t>[Add screenshot here]</a:t>
-            </a:r>
+            <a:endParaRPr/>
           </a:p>
         </p:txBody>
       </p:sp>
@@ -13784,6 +16601,7 @@
           <a:lstStyle/>
           <a:p>
             <a:pPr algn="ctr"/>
+            <a:endParaRPr/>
           </a:p>
         </p:txBody>
       </p:sp>
@@ -13827,6 +16645,7 @@
           <a:lstStyle/>
           <a:p>
             <a:pPr algn="ctr"/>
+            <a:endParaRPr/>
           </a:p>
         </p:txBody>
       </p:sp>
@@ -13968,42 +16787,7 @@
                 <a:latin typeface="Calibri"/>
               </a:defRPr>
             </a:pPr>
-          </a:p>
-        </p:txBody>
-      </p:sp>
-      <p:sp>
-        <p:nvSpPr>
-          <p:cNvPr id="24" name="TextBox 23"/>
-          <p:cNvSpPr txBox="1"/>
-          <p:nvPr/>
-        </p:nvSpPr>
-        <p:spPr>
-          <a:xfrm>
-            <a:off x="6309360" y="3282696"/>
-            <a:ext cx="2194560" cy="274320"/>
-          </a:xfrm>
-          <a:prstGeom prst="rect">
-            <a:avLst/>
-          </a:prstGeom>
-          <a:noFill/>
-        </p:spPr>
-        <p:txBody>
-          <a:bodyPr wrap="square">
-            <a:spAutoFit/>
-          </a:bodyPr>
-          <a:lstStyle/>
-          <a:p>
-            <a:pPr algn="l">
-              <a:defRPr sz="1300" b="0">
-                <a:solidFill>
-                  <a:srgbClr val="CCCCCC"/>
-                </a:solidFill>
-                <a:latin typeface="Calibri"/>
-              </a:defRPr>
-            </a:pPr>
-            <a:r>
-              <a:t>[Add screenshot here]</a:t>
-            </a:r>
+            <a:endParaRPr/>
           </a:p>
         </p:txBody>
       </p:sp>
@@ -14047,6 +16831,7 @@
           <a:lstStyle/>
           <a:p>
             <a:pPr algn="ctr"/>
+            <a:endParaRPr/>
           </a:p>
         </p:txBody>
       </p:sp>
@@ -14090,6 +16875,7 @@
           <a:lstStyle/>
           <a:p>
             <a:pPr algn="ctr"/>
+            <a:endParaRPr/>
           </a:p>
         </p:txBody>
       </p:sp>
@@ -14231,78 +17017,7 @@
                 <a:latin typeface="Calibri"/>
               </a:defRPr>
             </a:pPr>
-          </a:p>
-        </p:txBody>
-      </p:sp>
-      <p:sp>
-        <p:nvSpPr>
-          <p:cNvPr id="31" name="TextBox 30"/>
-          <p:cNvSpPr txBox="1"/>
-          <p:nvPr/>
-        </p:nvSpPr>
-        <p:spPr>
-          <a:xfrm>
-            <a:off x="9144000" y="3282696"/>
-            <a:ext cx="2194560" cy="274320"/>
-          </a:xfrm>
-          <a:prstGeom prst="rect">
-            <a:avLst/>
-          </a:prstGeom>
-          <a:noFill/>
-        </p:spPr>
-        <p:txBody>
-          <a:bodyPr wrap="square">
-            <a:spAutoFit/>
-          </a:bodyPr>
-          <a:lstStyle/>
-          <a:p>
-            <a:pPr algn="l">
-              <a:defRPr sz="1300" b="0">
-                <a:solidFill>
-                  <a:srgbClr val="CCCCCC"/>
-                </a:solidFill>
-                <a:latin typeface="Calibri"/>
-              </a:defRPr>
-            </a:pPr>
-            <a:r>
-              <a:t>[Add screenshot here]</a:t>
-            </a:r>
-          </a:p>
-        </p:txBody>
-      </p:sp>
-      <p:sp>
-        <p:nvSpPr>
-          <p:cNvPr id="32" name="TextBox 31"/>
-          <p:cNvSpPr txBox="1"/>
-          <p:nvPr/>
-        </p:nvSpPr>
-        <p:spPr>
-          <a:xfrm>
-            <a:off x="731520" y="5669280"/>
-            <a:ext cx="10515600" cy="457200"/>
-          </a:xfrm>
-          <a:prstGeom prst="rect">
-            <a:avLst/>
-          </a:prstGeom>
-          <a:noFill/>
-        </p:spPr>
-        <p:txBody>
-          <a:bodyPr wrap="square">
-            <a:spAutoFit/>
-          </a:bodyPr>
-          <a:lstStyle/>
-          <a:p>
-            <a:pPr algn="ctr">
-              <a:defRPr sz="1400" b="0">
-                <a:solidFill>
-                  <a:srgbClr val="AAAAAA"/>
-                </a:solidFill>
-                <a:latin typeface="Calibri"/>
-              </a:defRPr>
-            </a:pPr>
-            <a:r>
-              <a:t>Tip: Prepare real profile screenshots to show on this slide during the session.</a:t>
-            </a:r>
+            <a:endParaRPr/>
           </a:p>
         </p:txBody>
       </p:sp>
@@ -14315,7 +17030,7 @@
 </file>
 
 <file path=ppt/slides/slide5.xml><?xml version="1.0" encoding="utf-8"?>
-<p:sld xmlns:a="http://schemas.openxmlformats.org/drawingml/2006/main" xmlns:p="http://schemas.openxmlformats.org/presentationml/2006/main" xmlns:r="http://schemas.openxmlformats.org/officeDocument/2006/relationships">
+<p:sld xmlns:a="http://schemas.openxmlformats.org/drawingml/2006/main" xmlns:r="http://schemas.openxmlformats.org/officeDocument/2006/relationships" xmlns:p="http://schemas.openxmlformats.org/presentationml/2006/main">
   <p:cSld>
     <p:bg>
       <p:bgPr>
@@ -14331,7 +17046,14 @@
         <p:cNvGrpSpPr/>
         <p:nvPr/>
       </p:nvGrpSpPr>
-      <p:grpSpPr/>
+      <p:grpSpPr>
+        <a:xfrm>
+          <a:off x="0" y="0"/>
+          <a:ext cx="0" cy="0"/>
+          <a:chOff x="0" y="0"/>
+          <a:chExt cx="0" cy="0"/>
+        </a:xfrm>
+      </p:grpSpPr>
       <p:sp>
         <p:nvSpPr>
           <p:cNvPr id="2" name="TextBox 1"/>
@@ -14563,6 +17285,7 @@
           <a:lstStyle/>
           <a:p>
             <a:pPr algn="ctr"/>
+            <a:endParaRPr/>
           </a:p>
         </p:txBody>
       </p:sp>
@@ -14606,6 +17329,7 @@
           <a:lstStyle/>
           <a:p>
             <a:pPr algn="ctr"/>
+            <a:endParaRPr/>
           </a:p>
         </p:txBody>
       </p:sp>
@@ -14870,7 +17594,7 @@
 </file>
 
 <file path=ppt/slides/slide6.xml><?xml version="1.0" encoding="utf-8"?>
-<p:sld xmlns:a="http://schemas.openxmlformats.org/drawingml/2006/main" xmlns:p="http://schemas.openxmlformats.org/presentationml/2006/main" xmlns:r="http://schemas.openxmlformats.org/officeDocument/2006/relationships">
+<p:sld xmlns:a="http://schemas.openxmlformats.org/drawingml/2006/main" xmlns:r="http://schemas.openxmlformats.org/officeDocument/2006/relationships" xmlns:p="http://schemas.openxmlformats.org/presentationml/2006/main">
   <p:cSld>
     <p:bg>
       <p:bgPr>
@@ -14886,7 +17610,14 @@
         <p:cNvGrpSpPr/>
         <p:nvPr/>
       </p:nvGrpSpPr>
-      <p:grpSpPr/>
+      <p:grpSpPr>
+        <a:xfrm>
+          <a:off x="0" y="0"/>
+          <a:ext cx="0" cy="0"/>
+          <a:chOff x="0" y="0"/>
+          <a:chExt cx="0" cy="0"/>
+        </a:xfrm>
+      </p:grpSpPr>
       <p:sp>
         <p:nvSpPr>
           <p:cNvPr id="2" name="TextBox 1"/>
@@ -14978,10 +17709,34 @@
                 <a:tableStyleId>{5C22544A-7EE6-4342-B048-85BDC9FD1C3A}</a:tableStyleId>
               </a:tblPr>
               <a:tblGrid>
-                <a:gridCol w="2560320"/>
-                <a:gridCol w="2560320"/>
-                <a:gridCol w="1828800"/>
-                <a:gridCol w="3840480"/>
+                <a:gridCol w="2560320">
+                  <a:extLst>
+                    <a:ext uri="{9D8B030D-6E8A-4147-A177-3AD203B41FA5}">
+                      <a16:colId xmlns:a16="http://schemas.microsoft.com/office/drawing/2014/main" val="20000"/>
+                    </a:ext>
+                  </a:extLst>
+                </a:gridCol>
+                <a:gridCol w="2560320">
+                  <a:extLst>
+                    <a:ext uri="{9D8B030D-6E8A-4147-A177-3AD203B41FA5}">
+                      <a16:colId xmlns:a16="http://schemas.microsoft.com/office/drawing/2014/main" val="20001"/>
+                    </a:ext>
+                  </a:extLst>
+                </a:gridCol>
+                <a:gridCol w="1828800">
+                  <a:extLst>
+                    <a:ext uri="{9D8B030D-6E8A-4147-A177-3AD203B41FA5}">
+                      <a16:colId xmlns:a16="http://schemas.microsoft.com/office/drawing/2014/main" val="20002"/>
+                    </a:ext>
+                  </a:extLst>
+                </a:gridCol>
+                <a:gridCol w="3840480">
+                  <a:extLst>
+                    <a:ext uri="{9D8B030D-6E8A-4147-A177-3AD203B41FA5}">
+                      <a16:colId xmlns:a16="http://schemas.microsoft.com/office/drawing/2014/main" val="20003"/>
+                    </a:ext>
+                  </a:extLst>
+                </a:gridCol>
               </a:tblGrid>
               <a:tr h="365760">
                 <a:tc>
@@ -15080,6 +17835,11 @@
                     </a:solidFill>
                   </a:tcPr>
                 </a:tc>
+                <a:extLst>
+                  <a:ext uri="{0D108BD9-81ED-4DB2-BD59-A6C34878D82A}">
+                    <a16:rowId xmlns:a16="http://schemas.microsoft.com/office/drawing/2014/main" val="10000"/>
+                  </a:ext>
+                </a:extLst>
               </a:tr>
               <a:tr h="365760">
                 <a:tc>
@@ -15178,6 +17938,11 @@
                     </a:solidFill>
                   </a:tcPr>
                 </a:tc>
+                <a:extLst>
+                  <a:ext uri="{0D108BD9-81ED-4DB2-BD59-A6C34878D82A}">
+                    <a16:rowId xmlns:a16="http://schemas.microsoft.com/office/drawing/2014/main" val="10001"/>
+                  </a:ext>
+                </a:extLst>
               </a:tr>
               <a:tr h="365760">
                 <a:tc>
@@ -15276,6 +18041,11 @@
                     </a:solidFill>
                   </a:tcPr>
                 </a:tc>
+                <a:extLst>
+                  <a:ext uri="{0D108BD9-81ED-4DB2-BD59-A6C34878D82A}">
+                    <a16:rowId xmlns:a16="http://schemas.microsoft.com/office/drawing/2014/main" val="10002"/>
+                  </a:ext>
+                </a:extLst>
               </a:tr>
               <a:tr h="365760">
                 <a:tc>
@@ -15374,6 +18144,11 @@
                     </a:solidFill>
                   </a:tcPr>
                 </a:tc>
+                <a:extLst>
+                  <a:ext uri="{0D108BD9-81ED-4DB2-BD59-A6C34878D82A}">
+                    <a16:rowId xmlns:a16="http://schemas.microsoft.com/office/drawing/2014/main" val="10003"/>
+                  </a:ext>
+                </a:extLst>
               </a:tr>
               <a:tr h="365760">
                 <a:tc>
@@ -15472,6 +18247,11 @@
                     </a:solidFill>
                   </a:tcPr>
                 </a:tc>
+                <a:extLst>
+                  <a:ext uri="{0D108BD9-81ED-4DB2-BD59-A6C34878D82A}">
+                    <a16:rowId xmlns:a16="http://schemas.microsoft.com/office/drawing/2014/main" val="10004"/>
+                  </a:ext>
+                </a:extLst>
               </a:tr>
               <a:tr h="365760">
                 <a:tc>
@@ -15570,6 +18350,11 @@
                     </a:solidFill>
                   </a:tcPr>
                 </a:tc>
+                <a:extLst>
+                  <a:ext uri="{0D108BD9-81ED-4DB2-BD59-A6C34878D82A}">
+                    <a16:rowId xmlns:a16="http://schemas.microsoft.com/office/drawing/2014/main" val="10005"/>
+                  </a:ext>
+                </a:extLst>
               </a:tr>
             </a:tbl>
           </a:graphicData>
@@ -15620,7 +18405,7 @@
 </file>
 
 <file path=ppt/slides/slide7.xml><?xml version="1.0" encoding="utf-8"?>
-<p:sld xmlns:a="http://schemas.openxmlformats.org/drawingml/2006/main" xmlns:p="http://schemas.openxmlformats.org/presentationml/2006/main" xmlns:r="http://schemas.openxmlformats.org/officeDocument/2006/relationships">
+<p:sld xmlns:a="http://schemas.openxmlformats.org/drawingml/2006/main" xmlns:r="http://schemas.openxmlformats.org/officeDocument/2006/relationships" xmlns:p="http://schemas.openxmlformats.org/presentationml/2006/main">
   <p:cSld>
     <p:bg>
       <p:bgPr>
@@ -15636,7 +18421,14 @@
         <p:cNvGrpSpPr/>
         <p:nvPr/>
       </p:nvGrpSpPr>
-      <p:grpSpPr/>
+      <p:grpSpPr>
+        <a:xfrm>
+          <a:off x="0" y="0"/>
+          <a:ext cx="0" cy="0"/>
+          <a:chOff x="0" y="0"/>
+          <a:chExt cx="0" cy="0"/>
+        </a:xfrm>
+      </p:grpSpPr>
       <p:sp>
         <p:nvSpPr>
           <p:cNvPr id="2" name="TextBox 1"/>
@@ -15749,6 +18541,7 @@
           <a:lstStyle/>
           <a:p>
             <a:pPr algn="ctr"/>
+            <a:endParaRPr/>
           </a:p>
         </p:txBody>
       </p:sp>
@@ -15792,6 +18585,7 @@
           <a:lstStyle/>
           <a:p>
             <a:pPr algn="ctr"/>
+            <a:endParaRPr/>
           </a:p>
         </p:txBody>
       </p:sp>
@@ -16051,6 +18845,7 @@
           <a:lstStyle/>
           <a:p>
             <a:pPr algn="ctr"/>
+            <a:endParaRPr/>
           </a:p>
         </p:txBody>
       </p:sp>
@@ -16094,6 +18889,7 @@
           <a:lstStyle/>
           <a:p>
             <a:pPr algn="ctr"/>
+            <a:endParaRPr/>
           </a:p>
         </p:txBody>
       </p:sp>
@@ -16358,7 +19154,7 @@
 </file>
 
 <file path=ppt/slides/slide8.xml><?xml version="1.0" encoding="utf-8"?>
-<p:sld xmlns:a="http://schemas.openxmlformats.org/drawingml/2006/main" xmlns:p="http://schemas.openxmlformats.org/presentationml/2006/main" xmlns:r="http://schemas.openxmlformats.org/officeDocument/2006/relationships">
+<p:sld xmlns:a="http://schemas.openxmlformats.org/drawingml/2006/main" xmlns:r="http://schemas.openxmlformats.org/officeDocument/2006/relationships" xmlns:p="http://schemas.openxmlformats.org/presentationml/2006/main">
   <p:cSld>
     <p:bg>
       <p:bgPr>
@@ -16374,7 +19170,14 @@
         <p:cNvGrpSpPr/>
         <p:nvPr/>
       </p:nvGrpSpPr>
-      <p:grpSpPr/>
+      <p:grpSpPr>
+        <a:xfrm>
+          <a:off x="0" y="0"/>
+          <a:ext cx="0" cy="0"/>
+          <a:chOff x="0" y="0"/>
+          <a:chExt cx="0" cy="0"/>
+        </a:xfrm>
+      </p:grpSpPr>
       <p:sp>
         <p:nvSpPr>
           <p:cNvPr id="2" name="TextBox 1"/>
@@ -16451,6 +19254,7 @@
           <a:lstStyle/>
           <a:p>
             <a:pPr algn="ctr"/>
+            <a:endParaRPr/>
           </a:p>
         </p:txBody>
       </p:sp>
@@ -16494,6 +19298,7 @@
           <a:lstStyle/>
           <a:p>
             <a:pPr algn="ctr"/>
+            <a:endParaRPr/>
           </a:p>
         </p:txBody>
       </p:sp>
@@ -16609,6 +19414,7 @@
           <a:lstStyle/>
           <a:p>
             <a:pPr algn="ctr"/>
+            <a:endParaRPr/>
           </a:p>
         </p:txBody>
       </p:sp>
@@ -16652,6 +19458,7 @@
           <a:lstStyle/>
           <a:p>
             <a:pPr algn="ctr"/>
+            <a:endParaRPr/>
           </a:p>
         </p:txBody>
       </p:sp>
@@ -16767,6 +19574,7 @@
           <a:lstStyle/>
           <a:p>
             <a:pPr algn="ctr"/>
+            <a:endParaRPr/>
           </a:p>
         </p:txBody>
       </p:sp>
@@ -16810,6 +19618,7 @@
           <a:lstStyle/>
           <a:p>
             <a:pPr algn="ctr"/>
+            <a:endParaRPr/>
           </a:p>
         </p:txBody>
       </p:sp>
@@ -16925,6 +19734,7 @@
           <a:lstStyle/>
           <a:p>
             <a:pPr algn="ctr"/>
+            <a:endParaRPr/>
           </a:p>
         </p:txBody>
       </p:sp>
@@ -16968,6 +19778,7 @@
           <a:lstStyle/>
           <a:p>
             <a:pPr algn="ctr"/>
+            <a:endParaRPr/>
           </a:p>
         </p:txBody>
       </p:sp>
@@ -17083,6 +19894,7 @@
           <a:lstStyle/>
           <a:p>
             <a:pPr algn="ctr"/>
+            <a:endParaRPr/>
           </a:p>
         </p:txBody>
       </p:sp>
@@ -17126,6 +19938,7 @@
           <a:lstStyle/>
           <a:p>
             <a:pPr algn="ctr"/>
+            <a:endParaRPr/>
           </a:p>
         </p:txBody>
       </p:sp>
@@ -17241,6 +20054,7 @@
           <a:lstStyle/>
           <a:p>
             <a:pPr algn="ctr"/>
+            <a:endParaRPr/>
           </a:p>
         </p:txBody>
       </p:sp>
@@ -17284,6 +20098,7 @@
           <a:lstStyle/>
           <a:p>
             <a:pPr algn="ctr"/>
+            <a:endParaRPr/>
           </a:p>
         </p:txBody>
       </p:sp>
@@ -17368,7 +20183,7 @@
 </file>
 
 <file path=ppt/slides/slide9.xml><?xml version="1.0" encoding="utf-8"?>
-<p:sld xmlns:a="http://schemas.openxmlformats.org/drawingml/2006/main" xmlns:p="http://schemas.openxmlformats.org/presentationml/2006/main" xmlns:r="http://schemas.openxmlformats.org/officeDocument/2006/relationships">
+<p:sld xmlns:a="http://schemas.openxmlformats.org/drawingml/2006/main" xmlns:r="http://schemas.openxmlformats.org/officeDocument/2006/relationships" xmlns:p="http://schemas.openxmlformats.org/presentationml/2006/main">
   <p:cSld>
     <p:bg>
       <p:bgPr>
@@ -17384,7 +20199,14 @@
         <p:cNvGrpSpPr/>
         <p:nvPr/>
       </p:nvGrpSpPr>
-      <p:grpSpPr/>
+      <p:grpSpPr>
+        <a:xfrm>
+          <a:off x="0" y="0"/>
+          <a:ext cx="0" cy="0"/>
+          <a:chOff x="0" y="0"/>
+          <a:chExt cx="0" cy="0"/>
+        </a:xfrm>
+      </p:grpSpPr>
       <p:sp>
         <p:nvSpPr>
           <p:cNvPr id="2" name="TextBox 1"/>
@@ -17874,4 +20696,319 @@
   </a:objectDefaults>
   <a:extraClrSchemeLst/>
 </a:theme>
+</file>
+
+<file path=ppt/theme/theme2.xml><?xml version="1.0" encoding="utf-8"?>
+<a:theme xmlns:a="http://schemas.openxmlformats.org/drawingml/2006/main" name="Office Theme">
+  <a:themeElements>
+    <a:clrScheme name="Office">
+      <a:dk1>
+        <a:sysClr val="windowText" lastClr="000000"/>
+      </a:dk1>
+      <a:lt1>
+        <a:sysClr val="window" lastClr="FFFFFF"/>
+      </a:lt1>
+      <a:dk2>
+        <a:srgbClr val="0E2841"/>
+      </a:dk2>
+      <a:lt2>
+        <a:srgbClr val="E8E8E8"/>
+      </a:lt2>
+      <a:accent1>
+        <a:srgbClr val="156082"/>
+      </a:accent1>
+      <a:accent2>
+        <a:srgbClr val="E97132"/>
+      </a:accent2>
+      <a:accent3>
+        <a:srgbClr val="196B24"/>
+      </a:accent3>
+      <a:accent4>
+        <a:srgbClr val="0F9ED5"/>
+      </a:accent4>
+      <a:accent5>
+        <a:srgbClr val="A02B93"/>
+      </a:accent5>
+      <a:accent6>
+        <a:srgbClr val="4EA72E"/>
+      </a:accent6>
+      <a:hlink>
+        <a:srgbClr val="467886"/>
+      </a:hlink>
+      <a:folHlink>
+        <a:srgbClr val="96607D"/>
+      </a:folHlink>
+    </a:clrScheme>
+    <a:fontScheme name="Office">
+      <a:majorFont>
+        <a:latin typeface="Aptos Display" panose="02110004020202020204"/>
+        <a:ea typeface=""/>
+        <a:cs typeface=""/>
+        <a:font script="Jpan" typeface="游ゴシック Light"/>
+        <a:font script="Hang" typeface="맑은 고딕"/>
+        <a:font script="Hans" typeface="等线 Light"/>
+        <a:font script="Hant" typeface="新細明體"/>
+        <a:font script="Arab" typeface="Times New Roman"/>
+        <a:font script="Hebr" typeface="Times New Roman"/>
+        <a:font script="Thai" typeface="Angsana New"/>
+        <a:font script="Ethi" typeface="Nyala"/>
+        <a:font script="Beng" typeface="Vrinda"/>
+        <a:font script="Gujr" typeface="Shruti"/>
+        <a:font script="Khmr" typeface="MoolBoran"/>
+        <a:font script="Knda" typeface="Tunga"/>
+        <a:font script="Guru" typeface="Raavi"/>
+        <a:font script="Cans" typeface="Euphemia"/>
+        <a:font script="Cher" typeface="Plantagenet Cherokee"/>
+        <a:font script="Yiii" typeface="Microsoft Yi Baiti"/>
+        <a:font script="Tibt" typeface="Microsoft Himalaya"/>
+        <a:font script="Thaa" typeface="MV Boli"/>
+        <a:font script="Deva" typeface="Mangal"/>
+        <a:font script="Telu" typeface="Gautami"/>
+        <a:font script="Taml" typeface="Latha"/>
+        <a:font script="Syrc" typeface="Estrangelo Edessa"/>
+        <a:font script="Orya" typeface="Kalinga"/>
+        <a:font script="Mlym" typeface="Kartika"/>
+        <a:font script="Laoo" typeface="DokChampa"/>
+        <a:font script="Sinh" typeface="Iskoola Pota"/>
+        <a:font script="Mong" typeface="Mongolian Baiti"/>
+        <a:font script="Viet" typeface="Times New Roman"/>
+        <a:font script="Uigh" typeface="Microsoft Uighur"/>
+        <a:font script="Geor" typeface="Sylfaen"/>
+        <a:font script="Armn" typeface="Arial"/>
+        <a:font script="Bugi" typeface="Leelawadee UI"/>
+        <a:font script="Bopo" typeface="Microsoft JhengHei"/>
+        <a:font script="Java" typeface="Javanese Text"/>
+        <a:font script="Lisu" typeface="Segoe UI"/>
+        <a:font script="Mymr" typeface="Myanmar Text"/>
+        <a:font script="Nkoo" typeface="Ebrima"/>
+        <a:font script="Olck" typeface="Nirmala UI"/>
+        <a:font script="Osma" typeface="Ebrima"/>
+        <a:font script="Phag" typeface="Phagspa"/>
+        <a:font script="Syrn" typeface="Estrangelo Edessa"/>
+        <a:font script="Syrj" typeface="Estrangelo Edessa"/>
+        <a:font script="Syre" typeface="Estrangelo Edessa"/>
+        <a:font script="Sora" typeface="Nirmala UI"/>
+        <a:font script="Tale" typeface="Microsoft Tai Le"/>
+        <a:font script="Talu" typeface="Microsoft New Tai Lue"/>
+        <a:font script="Tfng" typeface="Ebrima"/>
+      </a:majorFont>
+      <a:minorFont>
+        <a:latin typeface="Aptos" panose="02110004020202020204"/>
+        <a:ea typeface=""/>
+        <a:cs typeface=""/>
+        <a:font script="Jpan" typeface="游ゴシック"/>
+        <a:font script="Hang" typeface="맑은 고딕"/>
+        <a:font script="Hans" typeface="等线"/>
+        <a:font script="Hant" typeface="新細明體"/>
+        <a:font script="Arab" typeface="Arial"/>
+        <a:font script="Hebr" typeface="Arial"/>
+        <a:font script="Thai" typeface="Cordia New"/>
+        <a:font script="Ethi" typeface="Nyala"/>
+        <a:font script="Beng" typeface="Vrinda"/>
+        <a:font script="Gujr" typeface="Shruti"/>
+        <a:font script="Khmr" typeface="DaunPenh"/>
+        <a:font script="Knda" typeface="Tunga"/>
+        <a:font script="Guru" typeface="Raavi"/>
+        <a:font script="Cans" typeface="Euphemia"/>
+        <a:font script="Cher" typeface="Plantagenet Cherokee"/>
+        <a:font script="Yiii" typeface="Microsoft Yi Baiti"/>
+        <a:font script="Tibt" typeface="Microsoft Himalaya"/>
+        <a:font script="Thaa" typeface="MV Boli"/>
+        <a:font script="Deva" typeface="Mangal"/>
+        <a:font script="Telu" typeface="Gautami"/>
+        <a:font script="Taml" typeface="Latha"/>
+        <a:font script="Syrc" typeface="Estrangelo Edessa"/>
+        <a:font script="Orya" typeface="Kalinga"/>
+        <a:font script="Mlym" typeface="Kartika"/>
+        <a:font script="Laoo" typeface="DokChampa"/>
+        <a:font script="Sinh" typeface="Iskoola Pota"/>
+        <a:font script="Mong" typeface="Mongolian Baiti"/>
+        <a:font script="Viet" typeface="Arial"/>
+        <a:font script="Uigh" typeface="Microsoft Uighur"/>
+        <a:font script="Geor" typeface="Sylfaen"/>
+        <a:font script="Armn" typeface="Arial"/>
+        <a:font script="Bugi" typeface="Leelawadee UI"/>
+        <a:font script="Bopo" typeface="Microsoft JhengHei"/>
+        <a:font script="Java" typeface="Javanese Text"/>
+        <a:font script="Lisu" typeface="Segoe UI"/>
+        <a:font script="Mymr" typeface="Myanmar Text"/>
+        <a:font script="Nkoo" typeface="Ebrima"/>
+        <a:font script="Olck" typeface="Nirmala UI"/>
+        <a:font script="Osma" typeface="Ebrima"/>
+        <a:font script="Phag" typeface="Phagspa"/>
+        <a:font script="Syrn" typeface="Estrangelo Edessa"/>
+        <a:font script="Syrj" typeface="Estrangelo Edessa"/>
+        <a:font script="Syre" typeface="Estrangelo Edessa"/>
+        <a:font script="Sora" typeface="Nirmala UI"/>
+        <a:font script="Tale" typeface="Microsoft Tai Le"/>
+        <a:font script="Talu" typeface="Microsoft New Tai Lue"/>
+        <a:font script="Tfng" typeface="Ebrima"/>
+      </a:minorFont>
+    </a:fontScheme>
+    <a:fmtScheme name="Office">
+      <a:fillStyleLst>
+        <a:solidFill>
+          <a:schemeClr val="phClr"/>
+        </a:solidFill>
+        <a:gradFill rotWithShape="1">
+          <a:gsLst>
+            <a:gs pos="0">
+              <a:schemeClr val="phClr">
+                <a:lumMod val="110000"/>
+                <a:satMod val="105000"/>
+                <a:tint val="67000"/>
+              </a:schemeClr>
+            </a:gs>
+            <a:gs pos="50000">
+              <a:schemeClr val="phClr">
+                <a:lumMod val="105000"/>
+                <a:satMod val="103000"/>
+                <a:tint val="73000"/>
+              </a:schemeClr>
+            </a:gs>
+            <a:gs pos="100000">
+              <a:schemeClr val="phClr">
+                <a:lumMod val="105000"/>
+                <a:satMod val="109000"/>
+                <a:tint val="81000"/>
+              </a:schemeClr>
+            </a:gs>
+          </a:gsLst>
+          <a:lin ang="5400000" scaled="0"/>
+        </a:gradFill>
+        <a:gradFill rotWithShape="1">
+          <a:gsLst>
+            <a:gs pos="0">
+              <a:schemeClr val="phClr">
+                <a:satMod val="103000"/>
+                <a:lumMod val="102000"/>
+                <a:tint val="94000"/>
+              </a:schemeClr>
+            </a:gs>
+            <a:gs pos="50000">
+              <a:schemeClr val="phClr">
+                <a:satMod val="110000"/>
+                <a:lumMod val="100000"/>
+                <a:shade val="100000"/>
+              </a:schemeClr>
+            </a:gs>
+            <a:gs pos="100000">
+              <a:schemeClr val="phClr">
+                <a:lumMod val="99000"/>
+                <a:satMod val="120000"/>
+                <a:shade val="78000"/>
+              </a:schemeClr>
+            </a:gs>
+          </a:gsLst>
+          <a:lin ang="5400000" scaled="0"/>
+        </a:gradFill>
+      </a:fillStyleLst>
+      <a:lnStyleLst>
+        <a:ln w="12700" cap="flat" cmpd="sng" algn="ctr">
+          <a:solidFill>
+            <a:schemeClr val="phClr"/>
+          </a:solidFill>
+          <a:prstDash val="solid"/>
+          <a:miter lim="800000"/>
+        </a:ln>
+        <a:ln w="19050" cap="flat" cmpd="sng" algn="ctr">
+          <a:solidFill>
+            <a:schemeClr val="phClr"/>
+          </a:solidFill>
+          <a:prstDash val="solid"/>
+          <a:miter lim="800000"/>
+        </a:ln>
+        <a:ln w="25400" cap="flat" cmpd="sng" algn="ctr">
+          <a:solidFill>
+            <a:schemeClr val="phClr"/>
+          </a:solidFill>
+          <a:prstDash val="solid"/>
+          <a:miter lim="800000"/>
+        </a:ln>
+      </a:lnStyleLst>
+      <a:effectStyleLst>
+        <a:effectStyle>
+          <a:effectLst/>
+        </a:effectStyle>
+        <a:effectStyle>
+          <a:effectLst/>
+        </a:effectStyle>
+        <a:effectStyle>
+          <a:effectLst>
+            <a:outerShdw blurRad="57150" dist="19050" dir="5400000" algn="ctr" rotWithShape="0">
+              <a:srgbClr val="000000">
+                <a:alpha val="63000"/>
+              </a:srgbClr>
+            </a:outerShdw>
+          </a:effectLst>
+        </a:effectStyle>
+      </a:effectStyleLst>
+      <a:bgFillStyleLst>
+        <a:solidFill>
+          <a:schemeClr val="phClr"/>
+        </a:solidFill>
+        <a:solidFill>
+          <a:schemeClr val="phClr">
+            <a:tint val="95000"/>
+            <a:satMod val="170000"/>
+          </a:schemeClr>
+        </a:solidFill>
+        <a:gradFill rotWithShape="1">
+          <a:gsLst>
+            <a:gs pos="0">
+              <a:schemeClr val="phClr">
+                <a:tint val="93000"/>
+                <a:satMod val="150000"/>
+                <a:shade val="98000"/>
+                <a:lumMod val="102000"/>
+              </a:schemeClr>
+            </a:gs>
+            <a:gs pos="50000">
+              <a:schemeClr val="phClr">
+                <a:tint val="98000"/>
+                <a:satMod val="130000"/>
+                <a:shade val="90000"/>
+                <a:lumMod val="103000"/>
+              </a:schemeClr>
+            </a:gs>
+            <a:gs pos="100000">
+              <a:schemeClr val="phClr">
+                <a:shade val="63000"/>
+                <a:satMod val="120000"/>
+              </a:schemeClr>
+            </a:gs>
+          </a:gsLst>
+          <a:lin ang="5400000" scaled="0"/>
+        </a:gradFill>
+      </a:bgFillStyleLst>
+    </a:fmtScheme>
+  </a:themeElements>
+  <a:objectDefaults>
+    <a:lnDef>
+      <a:spPr/>
+      <a:bodyPr/>
+      <a:lstStyle/>
+      <a:style>
+        <a:lnRef idx="2">
+          <a:schemeClr val="accent1"/>
+        </a:lnRef>
+        <a:fillRef idx="0">
+          <a:schemeClr val="accent1"/>
+        </a:fillRef>
+        <a:effectRef idx="1">
+          <a:schemeClr val="accent1"/>
+        </a:effectRef>
+        <a:fontRef idx="minor">
+          <a:schemeClr val="tx1"/>
+        </a:fontRef>
+      </a:style>
+    </a:lnDef>
+  </a:objectDefaults>
+  <a:extraClrSchemeLst/>
+  <a:extLst>
+    <a:ext uri="{05A4C25C-085E-4340-85A3-A5531E510DB2}">
+      <thm15:themeFamily xmlns:thm15="http://schemas.microsoft.com/office/thememl/2012/main" name="Office Theme" id="{2E142A2C-CD16-42D6-873A-C26D2A0506FA}" vid="{1BDDFF52-6CD6-40A5-AB3C-68EB2F1E4D0A}"/>
+    </a:ext>
+  </a:extLst>
+</a:theme>
 </file>